--- a/presentation/AI Based Language Translation Compiler.pptx
+++ b/presentation/AI Based Language Translation Compiler.pptx
@@ -4,6 +4,9 @@
   <p:sldMasterIdLst>
     <p:sldMasterId id="2147483648" r:id="rId1"/>
   </p:sldMasterIdLst>
+  <p:notesMasterIdLst>
+    <p:notesMasterId r:id="rId22"/>
+  </p:notesMasterIdLst>
   <p:sldIdLst>
     <p:sldId id="256" r:id="rId2"/>
     <p:sldId id="257" r:id="rId3"/>
@@ -26,9 +29,6 @@
     <p:sldId id="274" r:id="rId20"/>
     <p:sldId id="275" r:id="rId21"/>
   </p:sldIdLst>
-  <p:notesMasterIdLst>
-    <p:notesMasterId r:id="rId22"/>
-  </p:notesMasterIdLst>
   <p:sldSz cx="12192000" cy="6858000"/>
   <p:notesSz cx="6858000" cy="12192000"/>
   <p:defaultTextStyle>
@@ -126,12 +126,12 @@
   <p:extLst>
     <p:ext uri="{521415D9-36F7-43E2-AB2F-B90AF26B5E84}">
       <p14:sectionLst xmlns:p14="http://schemas.microsoft.com/office/powerpoint/2010/main">
-        <p14:section name="Opening" id="{a73a9d01-41a6-e095-e68b-a8f651ef3f16}">
+        <p14:section name="Opening" id="{A73A9D01-41A6-E095-E68B-A8F651EF3F16}">
           <p14:sldIdLst>
             <p14:sldId id="256"/>
           </p14:sldIdLst>
         </p14:section>
-        <p14:section name="Part 1 - Sakrit Kafle" id="{bbc7d6cc-9cb3-4444-3fa6-6eb3d07f96e9}">
+        <p14:section name="Part 1 - Sakrit Kafle" id="{BBC7D6CC-9CB3-4444-3FA6-6EB3D07F96E9}">
           <p14:sldIdLst>
             <p14:sldId id="257"/>
             <p14:sldId id="258"/>
@@ -141,7 +141,7 @@
             <p14:sldId id="262"/>
           </p14:sldIdLst>
         </p14:section>
-        <p14:section name="Part 2 - Abendra Adhikari" id="{e5c4c6d1-9c4e-6874-ef5a-93e0001e2783}">
+        <p14:section name="Part 2 - Abendra Adhikari" id="{E5C4C6D1-9C4E-6874-EF5A-93E0001E2783}">
           <p14:sldIdLst>
             <p14:sldId id="263"/>
             <p14:sldId id="264"/>
@@ -151,7 +151,7 @@
             <p14:sldId id="268"/>
           </p14:sldIdLst>
         </p14:section>
-        <p14:section name="Part 3 - Ankur Bhattarai" id="{e0ad9150-3954-c4b8-e76f-995fbdaf9f31}">
+        <p14:section name="Part 3 - Ankur Bhattarai" id="{E0AD9150-3954-C4B8-E76F-995FBDAF9F31}">
           <p14:sldIdLst>
             <p14:sldId id="269"/>
             <p14:sldId id="270"/>
@@ -193,234 +193,10 @@
           <a:chExt cx="0" cy="0"/>
         </a:xfrm>
       </p:grpSpPr>
-      <p:sp>
-        <p:nvSpPr>
-          <p:cNvPr id="2" name="Header Placeholder 1"/>
-          <p:cNvSpPr>
-            <a:spLocks noGrp="1"/>
-          </p:cNvSpPr>
-          <p:nvPr>
-            <p:ph type="hdr" sz="quarter"/>
-          </p:nvPr>
-        </p:nvSpPr>
-        <p:spPr>
-          <a:xfrm>
-            <a:off x="0" y="0"/>
-            <a:ext cx="2971800" cy="458788"/>
-          </a:xfrm>
-          <a:prstGeom prst="rect">
-            <a:avLst/>
-          </a:prstGeom>
-        </p:spPr>
-        <p:txBody>
-          <a:bodyPr vert="horz" lIns="91440" tIns="45720" rIns="91440" bIns="45720" rtlCol="0"/>
-          <a:lstStyle>
-            <a:lvl1pPr algn="l">
-              <a:defRPr sz="1200"/>
-            </a:lvl1pPr>
-          </a:lstStyle>
-          <a:p>
-            <a:endParaRPr lang="en-US"/>
-          </a:p>
-        </p:txBody>
-      </p:sp>
-      <p:sp>
-        <p:nvSpPr>
-          <p:cNvPr id="3" name="Date Placeholder 2"/>
-          <p:cNvSpPr>
-            <a:spLocks noGrp="1"/>
-          </p:cNvSpPr>
-          <p:nvPr>
-            <p:ph type="dt" idx="1"/>
-          </p:nvPr>
-        </p:nvSpPr>
-        <p:spPr>
-          <a:xfrm>
-            <a:off x="3884613" y="0"/>
-            <a:ext cx="2971800" cy="458788"/>
-          </a:xfrm>
-          <a:prstGeom prst="rect">
-            <a:avLst/>
-          </a:prstGeom>
-        </p:spPr>
-        <p:txBody>
-          <a:bodyPr vert="horz" lIns="91440" tIns="45720" rIns="91440" bIns="45720" rtlCol="0"/>
-          <a:lstStyle>
-            <a:lvl1pPr algn="r">
-              <a:defRPr sz="1200"/>
-            </a:lvl1pPr>
-          </a:lstStyle>
-          <a:p>
-            <a:fld id="{5282F153-3F37-0F45-9E97-73ACFA13230C}" type="datetimeFigureOut">
-              <a:rPr lang="en-US"/>
-              <a:t>7/23/19</a:t>
-            </a:fld>
-            <a:endParaRPr lang="en-US"/>
-          </a:p>
-        </p:txBody>
-      </p:sp>
-      <p:sp>
-        <p:nvSpPr>
-          <p:cNvPr id="4" name="Slide Image Placeholder 3"/>
-          <p:cNvSpPr>
-            <a:spLocks noGrp="1" noRot="1" noChangeAspect="1"/>
-          </p:cNvSpPr>
-          <p:nvPr>
-            <p:ph type="sldImg" idx="2"/>
-          </p:nvPr>
-        </p:nvSpPr>
-        <p:spPr>
-          <a:xfrm>
-            <a:off x="685800" y="1143000"/>
-            <a:ext cx="5486400" cy="3086100"/>
-          </a:xfrm>
-          <a:prstGeom prst="rect">
-            <a:avLst/>
-          </a:prstGeom>
-          <a:noFill/>
-          <a:ln w="12700">
-            <a:solidFill>
-              <a:prstClr val="black"/>
-            </a:solidFill>
-          </a:ln>
-        </p:spPr>
-        <p:txBody>
-          <a:bodyPr vert="horz" lIns="91440" tIns="45720" rIns="91440" bIns="45720" rtlCol="0" anchor="ctr"/>
-          <a:lstStyle/>
-          <a:p>
-            <a:endParaRPr lang="en-US"/>
-          </a:p>
-        </p:txBody>
-      </p:sp>
-      <p:sp>
-        <p:nvSpPr>
-          <p:cNvPr id="5" name="Notes Placeholder 4"/>
-          <p:cNvSpPr>
-            <a:spLocks noGrp="1"/>
-          </p:cNvSpPr>
-          <p:nvPr>
-            <p:ph type="body" sz="quarter" idx="3"/>
-          </p:nvPr>
-        </p:nvSpPr>
-        <p:spPr>
-          <a:xfrm>
-            <a:off x="685800" y="4400550"/>
-            <a:ext cx="5486400" cy="3600450"/>
-          </a:xfrm>
-          <a:prstGeom prst="rect">
-            <a:avLst/>
-          </a:prstGeom>
-        </p:spPr>
-        <p:txBody>
-          <a:bodyPr vert="horz" lIns="91440" tIns="45720" rIns="91440" bIns="45720" rtlCol="0"/>
-          <a:lstStyle/>
-          <a:p>
-            <a:pPr lvl="0"/>
-            <a:r>
-              <a:rPr lang="en-US"/>
-              <a:t>Click to edit Master text styles</a:t>
-            </a:r>
-          </a:p>
-          <a:p>
-            <a:pPr lvl="1"/>
-            <a:r>
-              <a:rPr lang="en-US"/>
-              <a:t>Second level</a:t>
-            </a:r>
-          </a:p>
-          <a:p>
-            <a:pPr lvl="2"/>
-            <a:r>
-              <a:rPr lang="en-US"/>
-              <a:t>Third level</a:t>
-            </a:r>
-          </a:p>
-          <a:p>
-            <a:pPr lvl="3"/>
-            <a:r>
-              <a:rPr lang="en-US"/>
-              <a:t>Fourth level</a:t>
-            </a:r>
-          </a:p>
-          <a:p>
-            <a:pPr lvl="4"/>
-            <a:r>
-              <a:rPr lang="en-US"/>
-              <a:t>Fifth level</a:t>
-            </a:r>
-          </a:p>
-        </p:txBody>
-      </p:sp>
-      <p:sp>
-        <p:nvSpPr>
-          <p:cNvPr id="6" name="Footer Placeholder 5"/>
-          <p:cNvSpPr>
-            <a:spLocks noGrp="1"/>
-          </p:cNvSpPr>
-          <p:nvPr>
-            <p:ph type="ftr" sz="quarter" idx="4"/>
-          </p:nvPr>
-        </p:nvSpPr>
-        <p:spPr>
-          <a:xfrm>
-            <a:off x="0" y="8685213"/>
-            <a:ext cx="2971800" cy="458787"/>
-          </a:xfrm>
-          <a:prstGeom prst="rect">
-            <a:avLst/>
-          </a:prstGeom>
-        </p:spPr>
-        <p:txBody>
-          <a:bodyPr vert="horz" lIns="91440" tIns="45720" rIns="91440" bIns="45720" rtlCol="0" anchor="b"/>
-          <a:lstStyle>
-            <a:lvl1pPr algn="l">
-              <a:defRPr sz="1200"/>
-            </a:lvl1pPr>
-          </a:lstStyle>
-          <a:p>
-            <a:endParaRPr lang="en-US"/>
-          </a:p>
-        </p:txBody>
-      </p:sp>
-      <p:sp>
-        <p:nvSpPr>
-          <p:cNvPr id="7" name="Slide Number Placeholder 6"/>
-          <p:cNvSpPr>
-            <a:spLocks noGrp="1"/>
-          </p:cNvSpPr>
-          <p:nvPr>
-            <p:ph type="sldNum" sz="quarter" idx="5"/>
-          </p:nvPr>
-        </p:nvSpPr>
-        <p:spPr>
-          <a:xfrm>
-            <a:off x="3884613" y="8685213"/>
-            <a:ext cx="2971800" cy="458787"/>
-          </a:xfrm>
-          <a:prstGeom prst="rect">
-            <a:avLst/>
-          </a:prstGeom>
-        </p:spPr>
-        <p:txBody>
-          <a:bodyPr vert="horz" lIns="91440" tIns="45720" rIns="91440" bIns="45720" rtlCol="0" anchor="b"/>
-          <a:lstStyle>
-            <a:lvl1pPr algn="r">
-              <a:defRPr sz="1200"/>
-            </a:lvl1pPr>
-          </a:lstStyle>
-          <a:p>
-            <a:fld id="{CE5E9CC1-C706-0F49-92D6-E571CC5EEA8F}" type="slidenum">
-              <a:rPr lang="en-US"/>
-              <a:t>‹#›</a:t>
-            </a:fld>
-            <a:endParaRPr lang="en-US"/>
-          </a:p>
-        </p:txBody>
-      </p:sp>
     </p:spTree>
     <p:extLst>
       <p:ext uri="{BB962C8B-B14F-4D97-AF65-F5344CB8AC3E}">
-        <p14:creationId xmlns:p14="http://schemas.microsoft.com/office/powerpoint/2010/main" val="1024086991"/>
+        <p14:creationId xmlns:p14="http://schemas.microsoft.com/office/powerpoint/2010/main" val="1599298377"/>
       </p:ext>
     </p:extLst>
   </p:cSld>
@@ -568,7 +344,6 @@
               <a:rPr lang="en-US" dirty="0"/>
               <a:t>Open with the claim, not the architecture: this compiler uses AI in three places, and in none of them is the AI trusted. Everything it produces is checked by something that can say no. Say that the three of us will take one part each, and that the application will be running throughout.</a:t>
             </a:r>
-            <a:endParaRPr lang="en-US" dirty="0"/>
           </a:p>
         </p:txBody>
       </p:sp>
@@ -656,7 +431,6 @@
               <a:rPr lang="en-US" dirty="0"/>
               <a:t>The phrase to use is 'bounded by something that can refuse it'. The model proposes an expression; the C compiler decides whether it is real.</a:t>
             </a:r>
-            <a:endParaRPr lang="en-US" dirty="0"/>
           </a:p>
         </p:txBody>
       </p:sp>
@@ -744,7 +518,6 @@
               <a:rPr lang="en-US" dirty="0"/>
               <a:t>This is the strongest single slide for the AI-usage question. Toggling it live in front of them is more convincing than any sentence on a slide.</a:t>
             </a:r>
-            <a:endParaRPr lang="en-US" dirty="0"/>
           </a:p>
         </p:txBody>
       </p:sp>
@@ -832,7 +605,6 @@
               <a:rPr lang="en-US" dirty="0"/>
               <a:t>Make clear this is a rewrite, not a patch. The model is allowed to change the algorithm, the loop shapes, the function names - whatever gets the same output inside the subset.</a:t>
             </a:r>
-            <a:endParaRPr lang="en-US" dirty="0"/>
           </a:p>
         </p:txBody>
       </p:sp>
@@ -920,7 +692,6 @@
               <a:rPr lang="en-US" dirty="0"/>
               <a:t>If you only have time for one thing in this part, it is this list. Five gates, and the model's answer has to pass all five. Then say: the model never touches the compiler - its answer is just text that the compiler then judges. If asked whether the model could game the test: the prompt does show it the expected output so it can check itself, and a rewrite that prints a multi-digit figure found in that output but nowhere in its own arithmetic is refused. Single digits are exempt, because a digit-printing routine legitimately prints 0 to 9.</a:t>
             </a:r>
-            <a:endParaRPr lang="en-US" dirty="0"/>
           </a:p>
         </p:txBody>
       </p:sp>
@@ -1008,7 +779,6 @@
               <a:rPr lang="en-US" dirty="0"/>
               <a:t>Hand over. This part is the newest work and the most honest part of the project. Do not rush the limitations slide - it is the one that earns marks.</a:t>
             </a:r>
-            <a:endParaRPr lang="en-US" dirty="0"/>
           </a:p>
         </p:txBody>
       </p:sp>
@@ -1096,7 +866,6 @@
               <a:rPr lang="en-US" dirty="0"/>
               <a:t>Explain why this is not a workaround: the model call was always just filling in a blank, and the blank can be filled by anything. The safety check, the compiler, the build and the comparisons are what decide the verdict, and all of them still run.</a:t>
             </a:r>
-            <a:endParaRPr lang="en-US" dirty="0"/>
           </a:p>
         </p:txBody>
       </p:sp>
@@ -1184,7 +953,6 @@
               <a:rPr lang="en-US" dirty="0"/>
               <a:t>The key sentence: this is the one result in the project that cannot be proved, so it must not be the one that looks strongest. That is why it is worded the way it is, and why the stage only runs when verification was impossible - never when it was possible and simply failed.</a:t>
             </a:r>
-            <a:endParaRPr lang="en-US" dirty="0"/>
           </a:p>
         </p:txBody>
       </p:sp>
@@ -1272,7 +1040,6 @@
               <a:rPr lang="en-US" dirty="0"/>
               <a:t>This is the moment of the demonstration. Run the binary, not the Python. Turn a face so they see it is live. Then say the honest part: nothing compared this with the ursina original, and we do not claim it did - what we claim is that the subset can express it and the compiler built it.</a:t>
             </a:r>
-            <a:endParaRPr lang="en-US" dirty="0"/>
           </a:p>
         </p:txBody>
       </p:sp>
@@ -1360,7 +1127,6 @@
               <a:rPr lang="en-US" dirty="0"/>
               <a:t>If there is one table to memorise, it is this one. Read the last column aloud - the examiner's real question is what stops the AI being wrong, and the answer is a different thing in each row.</a:t>
             </a:r>
-            <a:endParaRPr lang="en-US" dirty="0"/>
           </a:p>
         </p:txBody>
       </p:sp>
@@ -1448,7 +1214,6 @@
               <a:rPr lang="en-US" dirty="0"/>
               <a:t>Do not hurry this slide and do not apologise for it. Every item here is something we found by measuring rather than something we were told. The 2**100 example is the best one: a wrong answer that looked like an answer was the worst thing the compiler could do, so we turned it into an error.</a:t>
             </a:r>
-            <a:endParaRPr lang="en-US" dirty="0"/>
           </a:p>
         </p:txBody>
       </p:sp>
@@ -1536,7 +1301,6 @@
               <a:rPr lang="en-US" dirty="0"/>
               <a:t>Hand over. This part is the compiler proper: no AI at all. Make the point that everything in Part 1 would work with the network unplugged.</a:t>
             </a:r>
-            <a:endParaRPr lang="en-US" dirty="0"/>
           </a:p>
         </p:txBody>
       </p:sp>
@@ -1624,7 +1388,6 @@
               <a:rPr lang="en-US" dirty="0"/>
               <a:t>Close on the claim, not on thanks. If asked for the single best evidence, offer to toggle AI assist off and translate the same file - the compiler fails closed and names what is missing. That is the whole policy in one keystroke.</a:t>
             </a:r>
-            <a:endParaRPr lang="en-US" dirty="0"/>
           </a:p>
         </p:txBody>
       </p:sp>
@@ -1712,7 +1475,6 @@
               <a:rPr lang="en-US" dirty="0"/>
               <a:t>Keep this short. The subset is not a limitation we are apologising for - it is the thing that makes a provable translation possible at all. Point at the two boxes: same program, left is what we write, right is what the compiler emits.</a:t>
             </a:r>
-            <a:endParaRPr lang="en-US" dirty="0"/>
           </a:p>
         </p:txBody>
       </p:sp>
@@ -1800,7 +1562,6 @@
               <a:rPr lang="en-US" dirty="0"/>
               <a:t>This slide is the map for the whole talk. Say the gate is the ONLY route to a model inside the compiler, and that it is reached last, not first - the deterministic rules are tried first and the model only sees what is left over.</a:t>
             </a:r>
-            <a:endParaRPr lang="en-US" dirty="0"/>
           </a:p>
         </p:txBody>
       </p:sp>
@@ -1888,7 +1649,6 @@
               <a:rPr lang="en-US" dirty="0"/>
               <a:t>Two stages, one slide, because in the demo they are two clicks. Point out INDENT and DEDENT - that is the part people do not expect. On the parser, land this: a refusal here is a design decision, not a gap. We decided the subset has no decorators, so it says so in those words rather than reporting a syntax error.</a:t>
             </a:r>
-            <a:endParaRPr lang="en-US" dirty="0"/>
           </a:p>
         </p:txBody>
       </p:sp>
@@ -1976,7 +1736,6 @@
               <a:rPr lang="en-US" dirty="0"/>
               <a:t>This is the slide where we justify the AI policy. Read the last bullet out as written: this is the category of decision we refuse to delegate, and that refusal is in the source file as a comment.</a:t>
             </a:r>
-            <a:endParaRPr lang="en-US" dirty="0"/>
           </a:p>
         </p:txBody>
       </p:sp>
@@ -2064,7 +1823,6 @@
               <a:rPr lang="en-US" dirty="0"/>
               <a:t>The LL bullet is a real bug we found and fixed, with a test. If asked: the compiler used to emit bare literals, so an expression whose result fits in 64 bits could still wrap in 32. Worth mentioning because it shows the test suite earning its keep.</a:t>
             </a:r>
-            <a:endParaRPr lang="en-US" dirty="0"/>
           </a:p>
         </p:txBody>
       </p:sp>
@@ -2152,7 +1910,6 @@
               <a:rPr lang="en-US" dirty="0"/>
               <a:t>Hand over. This part answers the question the examiner will ask: how do you know the AI did not make it up?</a:t>
             </a:r>
-            <a:endParaRPr lang="en-US" dirty="0"/>
           </a:p>
         </p:txBody>
       </p:sp>
@@ -2240,7 +1997,6 @@
               <a:rPr lang="en-US" dirty="0"/>
               <a:t>Stress that the comparison is repeatable on demand from inside the window that makes the claim. We did that deliberately so nothing has to be taken on trust.</a:t>
             </a:r>
-            <a:endParaRPr lang="en-US" dirty="0"/>
           </a:p>
         </p:txBody>
       </p:sp>
@@ -2318,6 +2074,7 @@
         <a:solidFill>
           <a:schemeClr val="tx1"/>
         </a:solidFill>
+        <a:effectLst/>
       </p:bgPr>
     </p:bg>
     <p:spTree>
@@ -2337,9 +2094,11 @@
       <p:sp>
         <p:nvSpPr>
           <p:cNvPr id="2" name="Text 0"/>
-          <p:cNvSpPr/>
+          <p:cNvSpPr>
+            <a:spLocks noGrp="1"/>
+          </p:cNvSpPr>
           <p:nvPr>
-            <p:ph idx="100" type="title" hasCustomPrompt="1"/>
+            <p:ph type="title" idx="100" hasCustomPrompt="1"/>
           </p:nvPr>
         </p:nvSpPr>
         <p:spPr>
@@ -2356,7 +2115,7 @@
         <p:txBody>
           <a:bodyPr wrap="square" rtlCol="0"/>
           <a:lstStyle>
-            <a:lvl1pPr algn="l" indent="0" marL="0">
+            <a:lvl1pPr marL="0" indent="0" algn="l">
               <a:buNone/>
               <a:defRPr lang="en-US" sz="4000" b="1" dirty="0">
                 <a:solidFill>
@@ -2366,7 +2125,7 @@
             </a:lvl1pPr>
           </a:lstStyle>
           <a:p>
-            <a:pPr algn="l" indent="0" marL="0">
+            <a:pPr marL="0" indent="0" algn="l">
               <a:buNone/>
             </a:pPr>
             <a:endParaRPr lang="en-US" sz="4000" dirty="0"/>
@@ -2376,9 +2135,11 @@
       <p:sp>
         <p:nvSpPr>
           <p:cNvPr id="3" name="Text 0"/>
-          <p:cNvSpPr/>
+          <p:cNvSpPr>
+            <a:spLocks noGrp="1"/>
+          </p:cNvSpPr>
           <p:nvPr>
-            <p:ph idx="101" type="body" hasCustomPrompt="1"/>
+            <p:ph type="body" idx="101" hasCustomPrompt="1"/>
           </p:nvPr>
         </p:nvSpPr>
         <p:spPr>
@@ -2395,7 +2156,7 @@
         <p:txBody>
           <a:bodyPr wrap="square" rtlCol="0"/>
           <a:lstStyle>
-            <a:lvl1pPr algn="l" indent="0" marL="0">
+            <a:lvl1pPr marL="0" indent="0" algn="l">
               <a:buNone/>
               <a:defRPr lang="en-US" sz="1600" dirty="0">
                 <a:solidFill>
@@ -2405,7 +2166,7 @@
             </a:lvl1pPr>
           </a:lstStyle>
           <a:p>
-            <a:pPr algn="l" indent="0" marL="0">
+            <a:pPr marL="0" indent="0" algn="l">
               <a:buNone/>
             </a:pPr>
             <a:endParaRPr lang="en-US" sz="1600" dirty="0"/>
@@ -2428,6 +2189,7 @@
         <a:solidFill>
           <a:schemeClr val="tx2"/>
         </a:solidFill>
+        <a:effectLst/>
       </p:bgPr>
     </p:bg>
     <p:spTree>
@@ -2447,9 +2209,11 @@
       <p:sp>
         <p:nvSpPr>
           <p:cNvPr id="2" name="Text 0"/>
-          <p:cNvSpPr/>
+          <p:cNvSpPr>
+            <a:spLocks noGrp="1"/>
+          </p:cNvSpPr>
           <p:nvPr>
-            <p:ph idx="100" type="title" hasCustomPrompt="1"/>
+            <p:ph type="title" idx="100" hasCustomPrompt="1"/>
           </p:nvPr>
         </p:nvSpPr>
         <p:spPr>
@@ -2466,7 +2230,7 @@
         <p:txBody>
           <a:bodyPr wrap="square" rtlCol="0"/>
           <a:lstStyle>
-            <a:lvl1pPr algn="l" indent="0" marL="0">
+            <a:lvl1pPr marL="0" indent="0" algn="l">
               <a:buNone/>
               <a:defRPr lang="en-US" sz="3600" b="1" dirty="0">
                 <a:solidFill>
@@ -2476,7 +2240,7 @@
             </a:lvl1pPr>
           </a:lstStyle>
           <a:p>
-            <a:pPr algn="l" indent="0" marL="0">
+            <a:pPr marL="0" indent="0" algn="l">
               <a:buNone/>
             </a:pPr>
             <a:endParaRPr lang="en-US" sz="3600" dirty="0"/>
@@ -2486,9 +2250,11 @@
       <p:sp>
         <p:nvSpPr>
           <p:cNvPr id="3" name="Text 0"/>
-          <p:cNvSpPr/>
+          <p:cNvSpPr>
+            <a:spLocks noGrp="1"/>
+          </p:cNvSpPr>
           <p:nvPr>
-            <p:ph idx="101" type="body" hasCustomPrompt="1"/>
+            <p:ph type="body" idx="101" hasCustomPrompt="1"/>
           </p:nvPr>
         </p:nvSpPr>
         <p:spPr>
@@ -2505,7 +2271,7 @@
         <p:txBody>
           <a:bodyPr wrap="square" rtlCol="0"/>
           <a:lstStyle>
-            <a:lvl1pPr algn="l" indent="0" marL="0">
+            <a:lvl1pPr marL="0" indent="0" algn="l">
               <a:buNone/>
               <a:defRPr lang="en-US" sz="1600" dirty="0">
                 <a:solidFill>
@@ -2515,7 +2281,7 @@
             </a:lvl1pPr>
           </a:lstStyle>
           <a:p>
-            <a:pPr algn="l" indent="0" marL="0">
+            <a:pPr marL="0" indent="0" algn="l">
               <a:buNone/>
             </a:pPr>
             <a:endParaRPr lang="en-US" sz="1600" dirty="0"/>
@@ -2542,7 +2308,7 @@
           </a:prstGeom>
           <a:extLst>
             <a:ext uri="{C572A759-6A51-4108-AA02-DFA0A04FC94B}">
-              <ma14:wrappingTextBoxFlag xmlns:ma14="http://schemas.microsoft.com/office/mac/drawingml/2011/main" val="0"/>
+              <ma14:wrappingTextBoxFlag xmlns:ma14="http://schemas.microsoft.com/office/mac/drawingml/2011/main" xmlns="" val="0"/>
             </a:ext>
           </a:extLst>
         </p:spPr>
@@ -2560,8 +2326,8 @@
           <a:p>
             <a:pPr algn="l"/>
             <a:fld id="{F7021451-1387-4CA6-816F-3879F97B5CBC}" type="slidenum">
-              <a:rPr b="0" lang="en-US"/>
-              <a:t>1003</a:t>
+              <a:rPr lang="en-US" b="0"/>
+              <a:t>‹#›</a:t>
             </a:fld>
             <a:endParaRPr lang="en-US"/>
           </a:p>
@@ -2583,6 +2349,7 @@
         <a:solidFill>
           <a:schemeClr val="bg1"/>
         </a:solidFill>
+        <a:effectLst/>
       </p:bgPr>
     </p:bg>
     <p:spTree>
@@ -2602,9 +2369,11 @@
       <p:sp>
         <p:nvSpPr>
           <p:cNvPr id="2" name="Text 0"/>
-          <p:cNvSpPr/>
+          <p:cNvSpPr>
+            <a:spLocks noGrp="1"/>
+          </p:cNvSpPr>
           <p:nvPr>
-            <p:ph idx="100" type="title" hasCustomPrompt="1"/>
+            <p:ph type="title" idx="100" hasCustomPrompt="1"/>
           </p:nvPr>
         </p:nvSpPr>
         <p:spPr>
@@ -2621,7 +2390,7 @@
         <p:txBody>
           <a:bodyPr wrap="square" rtlCol="0"/>
           <a:lstStyle>
-            <a:lvl1pPr algn="l" indent="0" marL="0">
+            <a:lvl1pPr marL="0" indent="0" algn="l">
               <a:buNone/>
               <a:defRPr lang="en-US" sz="3000" b="1" dirty="0">
                 <a:solidFill>
@@ -2631,7 +2400,7 @@
             </a:lvl1pPr>
           </a:lstStyle>
           <a:p>
-            <a:pPr algn="l" indent="0" marL="0">
+            <a:pPr marL="0" indent="0" algn="l">
               <a:buNone/>
             </a:pPr>
             <a:endParaRPr lang="en-US" sz="3000" dirty="0"/>
@@ -2658,7 +2427,7 @@
           </a:prstGeom>
           <a:extLst>
             <a:ext uri="{C572A759-6A51-4108-AA02-DFA0A04FC94B}">
-              <ma14:wrappingTextBoxFlag xmlns:ma14="http://schemas.microsoft.com/office/mac/drawingml/2011/main" val="0"/>
+              <ma14:wrappingTextBoxFlag xmlns:ma14="http://schemas.microsoft.com/office/mac/drawingml/2011/main" xmlns="" val="0"/>
             </a:ext>
           </a:extLst>
         </p:spPr>
@@ -2676,8 +2445,8 @@
           <a:p>
             <a:pPr algn="l"/>
             <a:fld id="{F7021451-1387-4CA6-816F-3879F97B5CBC}" type="slidenum">
-              <a:rPr b="0" lang="en-US"/>
-              <a:t>1004</a:t>
+              <a:rPr lang="en-US" b="0"/>
+              <a:t>‹#›</a:t>
             </a:fld>
             <a:endParaRPr lang="en-US"/>
           </a:p>
@@ -2694,6 +2463,11 @@
 <file path=ppt/slideMasters/slideMaster1.xml><?xml version="1.0" encoding="utf-8"?>
 <p:sldMaster xmlns:a="http://schemas.openxmlformats.org/drawingml/2006/main" xmlns:r="http://schemas.openxmlformats.org/officeDocument/2006/relationships" xmlns:p="http://schemas.openxmlformats.org/presentationml/2006/main">
   <p:cSld>
+    <p:bg>
+      <p:bgRef idx="1001">
+        <a:schemeClr val="bg1"/>
+      </p:bgRef>
+    </p:bg>
     <p:spTree>
       <p:nvGrpSpPr>
         <p:cNvPr id="1" name=""/>
@@ -2728,7 +2502,7 @@
           </a:prstGeom>
           <a:extLst>
             <a:ext uri="{C572A759-6A51-4108-AA02-DFA0A04FC94B}">
-              <ma14:wrappingTextBoxFlag xmlns:ma14="http://schemas.microsoft.com/office/mac/drawingml/2011/main" val="0"/>
+              <ma14:wrappingTextBoxFlag xmlns:ma14="http://schemas.microsoft.com/office/mac/drawingml/2011/main" xmlns="" val="0"/>
             </a:ext>
           </a:extLst>
         </p:spPr>
@@ -2746,8 +2520,8 @@
           <a:p>
             <a:pPr algn="l"/>
             <a:fld id="{F7021451-1387-4CA6-816F-3879F97B5CBC}" type="slidenum">
-              <a:rPr b="0" lang="en-US"/>
-              <a:t>null</a:t>
+              <a:rPr lang="en-US" b="0"/>
+              <a:t>‹#›</a:t>
             </a:fld>
             <a:endParaRPr lang="en-US"/>
           </a:p>
@@ -3036,9 +2810,11 @@
       <p:sp>
         <p:nvSpPr>
           <p:cNvPr id="2" name="Text 0"/>
-          <p:cNvSpPr/>
+          <p:cNvSpPr>
+            <a:spLocks noGrp="1"/>
+          </p:cNvSpPr>
           <p:nvPr>
-            <p:ph idx="100" type="title" hasCustomPrompt="1"/>
+            <p:ph type="title" idx="100" hasCustomPrompt="1"/>
           </p:nvPr>
         </p:nvSpPr>
         <p:spPr>
@@ -3056,7 +2832,7 @@
           <a:bodyPr wrap="square" rtlCol="0"/>
           <a:lstStyle/>
           <a:p>
-            <a:pPr algn="l" indent="0" marL="0">
+            <a:pPr marL="0" indent="0" algn="l">
               <a:buNone/>
             </a:pPr>
             <a:r>
@@ -3074,9 +2850,11 @@
       <p:sp>
         <p:nvSpPr>
           <p:cNvPr id="3" name="Text 0"/>
-          <p:cNvSpPr/>
+          <p:cNvSpPr>
+            <a:spLocks noGrp="1"/>
+          </p:cNvSpPr>
           <p:nvPr>
-            <p:ph idx="101" type="body" hasCustomPrompt="1"/>
+            <p:ph type="body" idx="101" hasCustomPrompt="1"/>
           </p:nvPr>
         </p:nvSpPr>
         <p:spPr>
@@ -3094,7 +2872,7 @@
           <a:bodyPr wrap="square" rtlCol="0"/>
           <a:lstStyle/>
           <a:p>
-            <a:pPr algn="l" indent="0" marL="0">
+            <a:pPr marL="0" indent="0" algn="l">
               <a:buNone/>
             </a:pPr>
             <a:r>
@@ -3108,13 +2886,13 @@
             <a:endParaRPr lang="en-US" sz="1600" dirty="0"/>
           </a:p>
           <a:p>
-            <a:pPr algn="l" indent="0" marL="0">
+            <a:pPr marL="0" indent="0" algn="l">
               <a:buNone/>
             </a:pPr>
             <a:endParaRPr lang="en-US" sz="1600" dirty="0"/>
           </a:p>
           <a:p>
-            <a:pPr algn="l" indent="0" marL="0">
+            <a:pPr marL="0" indent="0" algn="l">
               <a:buNone/>
             </a:pPr>
             <a:r>
@@ -3123,12 +2901,12 @@
                   <a:srgbClr val="7FB3A3"/>
                 </a:solidFill>
               </a:rPr>
-              <a:t>Sakrit Kafle  24BCE2952      Abendra Adhikari  24BCE2952      Ankur Bhattarai  24BCE2953</a:t>
+              <a:t>Sakrit Kafle  24BCE2952      Abendra Adhikari  24BCE2953      Ankur Bhattarai  24BCE2954</a:t>
             </a:r>
             <a:endParaRPr lang="en-US" sz="1600" dirty="0"/>
           </a:p>
           <a:p>
-            <a:pPr algn="l" indent="0" marL="0">
+            <a:pPr marL="0" indent="0" algn="l">
               <a:buNone/>
             </a:pPr>
             <a:r>
@@ -3164,7 +2942,7 @@
           <a:bodyPr wrap="square" lIns="0" tIns="0" rIns="0" bIns="0" rtlCol="0" anchor="ctr"/>
           <a:lstStyle/>
           <a:p>
-            <a:pPr indent="0" marL="0">
+            <a:pPr marL="0" indent="0">
               <a:buNone/>
             </a:pPr>
             <a:r>
@@ -3207,9 +2985,11 @@
       <p:sp>
         <p:nvSpPr>
           <p:cNvPr id="2" name="Text 0"/>
-          <p:cNvSpPr/>
+          <p:cNvSpPr>
+            <a:spLocks noGrp="1"/>
+          </p:cNvSpPr>
           <p:nvPr>
-            <p:ph idx="100" type="title" hasCustomPrompt="1"/>
+            <p:ph type="title" idx="100" hasCustomPrompt="1"/>
           </p:nvPr>
         </p:nvSpPr>
         <p:spPr>
@@ -3227,7 +3007,7 @@
           <a:bodyPr wrap="square" rtlCol="0"/>
           <a:lstStyle/>
           <a:p>
-            <a:pPr algn="l" indent="0" marL="0">
+            <a:pPr marL="0" indent="0" algn="l">
               <a:buNone/>
             </a:pPr>
             <a:r>
@@ -3244,14 +3024,14 @@
       </p:sp>
       <p:pic>
         <p:nvPicPr>
-          <p:cNvPr id="3" name="Image 0" descr="C:\Users\ACER\Desktop\translation-compiler\report_submission\screenshots\gui_07_ai_gate_report.png">    </p:cNvPr>
+          <p:cNvPr id="3" name="Image 0" descr="C:\Users\ACER\Desktop\translation-compiler\report_submission\screenshots\gui_07_ai_gate_report.png"/>
           <p:cNvPicPr>
             <a:picLocks noChangeAspect="1"/>
           </p:cNvPicPr>
           <p:nvPr/>
         </p:nvPicPr>
         <p:blipFill>
-          <a:blip r:embed="rId1"/>
+          <a:blip r:embed="rId3"/>
           <a:stretch>
             <a:fillRect/>
           </a:stretch>
@@ -3420,7 +3200,7 @@
           <a:bodyPr wrap="square" lIns="0" tIns="0" rIns="0" bIns="0" rtlCol="0" anchor="ctr"/>
           <a:lstStyle/>
           <a:p>
-            <a:pPr indent="0" marL="0">
+            <a:pPr marL="0" indent="0">
               <a:buNone/>
             </a:pPr>
             <a:r>
@@ -3431,9 +3211,6 @@
               </a:rPr>
               <a:t>DEMO   </a:t>
             </a:r>
-            <a:pPr indent="0" marL="0">
-              <a:buNone/>
-            </a:pPr>
             <a:r>
               <a:rPr lang="en-US" sz="1250" dirty="0">
                 <a:solidFill>
@@ -3467,7 +3244,7 @@
           <a:bodyPr wrap="square" lIns="0" tIns="0" rIns="0" bIns="0" rtlCol="0" anchor="ctr"/>
           <a:lstStyle/>
           <a:p>
-            <a:pPr indent="0" marL="0">
+            <a:pPr marL="0" indent="0">
               <a:buNone/>
             </a:pPr>
             <a:r>
@@ -3502,7 +3279,7 @@
           </a:prstGeom>
           <a:extLst>
             <a:ext uri="{C572A759-6A51-4108-AA02-DFA0A04FC94B}">
-              <ma14:wrappingTextBoxFlag xmlns:ma14="http://schemas.microsoft.com/office/mac/drawingml/2011/main" val="0"/>
+              <ma14:wrappingTextBoxFlag xmlns:ma14="http://schemas.microsoft.com/office/mac/drawingml/2011/main" xmlns="" val="0"/>
             </a:ext>
           </a:extLst>
         </p:spPr>
@@ -3520,7 +3297,7 @@
           <a:p>
             <a:pPr algn="l"/>
             <a:fld id="{F7021451-1387-4CA6-816F-3879F97B5CBC}" type="slidenum">
-              <a:rPr b="0" lang="en-US"/>
+              <a:rPr lang="en-US" b="0"/>
               <a:t>10</a:t>
             </a:fld>
             <a:endParaRPr lang="en-US"/>
@@ -3555,9 +3332,11 @@
       <p:sp>
         <p:nvSpPr>
           <p:cNvPr id="2" name="Text 0"/>
-          <p:cNvSpPr/>
+          <p:cNvSpPr>
+            <a:spLocks noGrp="1"/>
+          </p:cNvSpPr>
           <p:nvPr>
-            <p:ph idx="100" type="title" hasCustomPrompt="1"/>
+            <p:ph type="title" idx="100" hasCustomPrompt="1"/>
           </p:nvPr>
         </p:nvSpPr>
         <p:spPr>
@@ -3575,7 +3354,7 @@
           <a:bodyPr wrap="square" rtlCol="0"/>
           <a:lstStyle/>
           <a:p>
-            <a:pPr algn="l" indent="0" marL="0">
+            <a:pPr marL="0" indent="0" algn="l">
               <a:buNone/>
             </a:pPr>
             <a:r>
@@ -3592,14 +3371,14 @@
       </p:sp>
       <p:pic>
         <p:nvPicPr>
-          <p:cNvPr id="3" name="Image 0" descr="C:\Users\ACER\Desktop\translation-compiler\report_submission\screenshots\cli_05_gate_off_fails.png">    </p:cNvPr>
+          <p:cNvPr id="3" name="Image 0" descr="C:\Users\ACER\Desktop\translation-compiler\report_submission\screenshots\cli_05_gate_off_fails.png"/>
           <p:cNvPicPr>
             <a:picLocks noChangeAspect="1"/>
           </p:cNvPicPr>
           <p:nvPr/>
         </p:nvPicPr>
         <p:blipFill>
-          <a:blip r:embed="rId1"/>
+          <a:blip r:embed="rId3"/>
           <a:stretch>
             <a:fillRect/>
           </a:stretch>
@@ -3768,7 +3547,7 @@
           <a:bodyPr wrap="square" lIns="0" tIns="0" rIns="0" bIns="0" rtlCol="0" anchor="ctr"/>
           <a:lstStyle/>
           <a:p>
-            <a:pPr indent="0" marL="0">
+            <a:pPr marL="0" indent="0">
               <a:buNone/>
             </a:pPr>
             <a:r>
@@ -3779,9 +3558,6 @@
               </a:rPr>
               <a:t>DEMO   </a:t>
             </a:r>
-            <a:pPr indent="0" marL="0">
-              <a:buNone/>
-            </a:pPr>
             <a:r>
               <a:rPr lang="en-US" sz="1250" dirty="0">
                 <a:solidFill>
@@ -3814,7 +3590,7 @@
           </a:prstGeom>
           <a:extLst>
             <a:ext uri="{C572A759-6A51-4108-AA02-DFA0A04FC94B}">
-              <ma14:wrappingTextBoxFlag xmlns:ma14="http://schemas.microsoft.com/office/mac/drawingml/2011/main" val="0"/>
+              <ma14:wrappingTextBoxFlag xmlns:ma14="http://schemas.microsoft.com/office/mac/drawingml/2011/main" xmlns="" val="0"/>
             </a:ext>
           </a:extLst>
         </p:spPr>
@@ -3832,7 +3608,7 @@
           <a:p>
             <a:pPr algn="l"/>
             <a:fld id="{F7021451-1387-4CA6-816F-3879F97B5CBC}" type="slidenum">
-              <a:rPr b="0" lang="en-US"/>
+              <a:rPr lang="en-US" b="0"/>
               <a:t>11</a:t>
             </a:fld>
             <a:endParaRPr lang="en-US"/>
@@ -3867,9 +3643,11 @@
       <p:sp>
         <p:nvSpPr>
           <p:cNvPr id="2" name="Text 0"/>
-          <p:cNvSpPr/>
+          <p:cNvSpPr>
+            <a:spLocks noGrp="1"/>
+          </p:cNvSpPr>
           <p:nvPr>
-            <p:ph idx="100" type="title" hasCustomPrompt="1"/>
+            <p:ph type="title" idx="100" hasCustomPrompt="1"/>
           </p:nvPr>
         </p:nvSpPr>
         <p:spPr>
@@ -3887,7 +3665,7 @@
           <a:bodyPr wrap="square" rtlCol="0"/>
           <a:lstStyle/>
           <a:p>
-            <a:pPr algn="l" indent="0" marL="0">
+            <a:pPr marL="0" indent="0" algn="l">
               <a:buNone/>
             </a:pPr>
             <a:r>
@@ -3904,14 +3682,14 @@
       </p:sp>
       <p:pic>
         <p:nvPicPr>
-          <p:cNvPr id="3" name="Image 0" descr="C:\Users\ACER\Desktop\translation-compiler\report_submission\screenshots\gui_09_repair_comparison.png">    </p:cNvPr>
+          <p:cNvPr id="3" name="Image 0" descr="C:\Users\ACER\Desktop\translation-compiler\report_submission\screenshots\gui_09_repair_comparison.png"/>
           <p:cNvPicPr>
             <a:picLocks noChangeAspect="1"/>
           </p:cNvPicPr>
           <p:nvPr/>
         </p:nvPicPr>
         <p:blipFill>
-          <a:blip r:embed="rId1"/>
+          <a:blip r:embed="rId3"/>
           <a:stretch>
             <a:fillRect/>
           </a:stretch>
@@ -4080,7 +3858,7 @@
           <a:bodyPr wrap="square" lIns="0" tIns="0" rIns="0" bIns="0" rtlCol="0" anchor="ctr"/>
           <a:lstStyle/>
           <a:p>
-            <a:pPr indent="0" marL="0">
+            <a:pPr marL="0" indent="0">
               <a:buNone/>
             </a:pPr>
             <a:r>
@@ -4091,9 +3869,6 @@
               </a:rPr>
               <a:t>DEMO   </a:t>
             </a:r>
-            <a:pPr indent="0" marL="0">
-              <a:buNone/>
-            </a:pPr>
             <a:r>
               <a:rPr lang="en-US" sz="1250" dirty="0">
                 <a:solidFill>
@@ -4126,7 +3901,7 @@
           </a:prstGeom>
           <a:extLst>
             <a:ext uri="{C572A759-6A51-4108-AA02-DFA0A04FC94B}">
-              <ma14:wrappingTextBoxFlag xmlns:ma14="http://schemas.microsoft.com/office/mac/drawingml/2011/main" val="0"/>
+              <ma14:wrappingTextBoxFlag xmlns:ma14="http://schemas.microsoft.com/office/mac/drawingml/2011/main" xmlns="" val="0"/>
             </a:ext>
           </a:extLst>
         </p:spPr>
@@ -4144,7 +3919,7 @@
           <a:p>
             <a:pPr algn="l"/>
             <a:fld id="{F7021451-1387-4CA6-816F-3879F97B5CBC}" type="slidenum">
-              <a:rPr b="0" lang="en-US"/>
+              <a:rPr lang="en-US" b="0"/>
               <a:t>12</a:t>
             </a:fld>
             <a:endParaRPr lang="en-US"/>
@@ -4179,9 +3954,11 @@
       <p:sp>
         <p:nvSpPr>
           <p:cNvPr id="2" name="Text 0"/>
-          <p:cNvSpPr/>
+          <p:cNvSpPr>
+            <a:spLocks noGrp="1"/>
+          </p:cNvSpPr>
           <p:nvPr>
-            <p:ph idx="100" type="title" hasCustomPrompt="1"/>
+            <p:ph type="title" idx="100" hasCustomPrompt="1"/>
           </p:nvPr>
         </p:nvSpPr>
         <p:spPr>
@@ -4199,7 +3976,7 @@
           <a:bodyPr wrap="square" rtlCol="0"/>
           <a:lstStyle/>
           <a:p>
-            <a:pPr algn="l" indent="0" marL="0">
+            <a:pPr marL="0" indent="0" algn="l">
               <a:buNone/>
             </a:pPr>
             <a:r>
@@ -4260,7 +4037,7 @@
           <a:bodyPr wrap="square" lIns="0" tIns="0" rIns="0" bIns="0" rtlCol="0" anchor="ctr"/>
           <a:lstStyle/>
           <a:p>
-            <a:pPr algn="ctr" indent="0" marL="0">
+            <a:pPr marL="0" indent="0" algn="ctr">
               <a:buNone/>
             </a:pPr>
             <a:r>
@@ -4296,7 +4073,7 @@
           <a:bodyPr wrap="square" lIns="0" tIns="0" rIns="0" bIns="0" rtlCol="0" anchor="ctr"/>
           <a:lstStyle/>
           <a:p>
-            <a:pPr indent="0" marL="0">
+            <a:pPr marL="0" indent="0">
               <a:buNone/>
             </a:pPr>
             <a:r>
@@ -4332,7 +4109,7 @@
           <a:bodyPr wrap="square" lIns="0" tIns="0" rIns="0" bIns="0" rtlCol="0" anchor="ctr"/>
           <a:lstStyle/>
           <a:p>
-            <a:pPr indent="0" marL="0">
+            <a:pPr marL="0" indent="0">
               <a:buNone/>
             </a:pPr>
             <a:r>
@@ -4393,7 +4170,7 @@
           <a:bodyPr wrap="square" lIns="0" tIns="0" rIns="0" bIns="0" rtlCol="0" anchor="ctr"/>
           <a:lstStyle/>
           <a:p>
-            <a:pPr algn="ctr" indent="0" marL="0">
+            <a:pPr marL="0" indent="0" algn="ctr">
               <a:buNone/>
             </a:pPr>
             <a:r>
@@ -4429,7 +4206,7 @@
           <a:bodyPr wrap="square" lIns="0" tIns="0" rIns="0" bIns="0" rtlCol="0" anchor="ctr"/>
           <a:lstStyle/>
           <a:p>
-            <a:pPr indent="0" marL="0">
+            <a:pPr marL="0" indent="0">
               <a:buNone/>
             </a:pPr>
             <a:r>
@@ -4465,7 +4242,7 @@
           <a:bodyPr wrap="square" lIns="0" tIns="0" rIns="0" bIns="0" rtlCol="0" anchor="ctr"/>
           <a:lstStyle/>
           <a:p>
-            <a:pPr indent="0" marL="0">
+            <a:pPr marL="0" indent="0">
               <a:buNone/>
             </a:pPr>
             <a:r>
@@ -4526,7 +4303,7 @@
           <a:bodyPr wrap="square" lIns="0" tIns="0" rIns="0" bIns="0" rtlCol="0" anchor="ctr"/>
           <a:lstStyle/>
           <a:p>
-            <a:pPr algn="ctr" indent="0" marL="0">
+            <a:pPr marL="0" indent="0" algn="ctr">
               <a:buNone/>
             </a:pPr>
             <a:r>
@@ -4562,7 +4339,7 @@
           <a:bodyPr wrap="square" lIns="0" tIns="0" rIns="0" bIns="0" rtlCol="0" anchor="ctr"/>
           <a:lstStyle/>
           <a:p>
-            <a:pPr indent="0" marL="0">
+            <a:pPr marL="0" indent="0">
               <a:buNone/>
             </a:pPr>
             <a:r>
@@ -4598,7 +4375,7 @@
           <a:bodyPr wrap="square" lIns="0" tIns="0" rIns="0" bIns="0" rtlCol="0" anchor="ctr"/>
           <a:lstStyle/>
           <a:p>
-            <a:pPr indent="0" marL="0">
+            <a:pPr marL="0" indent="0">
               <a:buNone/>
             </a:pPr>
             <a:r>
@@ -4659,7 +4436,7 @@
           <a:bodyPr wrap="square" lIns="0" tIns="0" rIns="0" bIns="0" rtlCol="0" anchor="ctr"/>
           <a:lstStyle/>
           <a:p>
-            <a:pPr algn="ctr" indent="0" marL="0">
+            <a:pPr marL="0" indent="0" algn="ctr">
               <a:buNone/>
             </a:pPr>
             <a:r>
@@ -4695,7 +4472,7 @@
           <a:bodyPr wrap="square" lIns="0" tIns="0" rIns="0" bIns="0" rtlCol="0" anchor="ctr"/>
           <a:lstStyle/>
           <a:p>
-            <a:pPr indent="0" marL="0">
+            <a:pPr marL="0" indent="0">
               <a:buNone/>
             </a:pPr>
             <a:r>
@@ -4731,7 +4508,7 @@
           <a:bodyPr wrap="square" lIns="0" tIns="0" rIns="0" bIns="0" rtlCol="0" anchor="ctr"/>
           <a:lstStyle/>
           <a:p>
-            <a:pPr indent="0" marL="0">
+            <a:pPr marL="0" indent="0">
               <a:buNone/>
             </a:pPr>
             <a:r>
@@ -4792,7 +4569,7 @@
           <a:bodyPr wrap="square" lIns="0" tIns="0" rIns="0" bIns="0" rtlCol="0" anchor="ctr"/>
           <a:lstStyle/>
           <a:p>
-            <a:pPr algn="ctr" indent="0" marL="0">
+            <a:pPr marL="0" indent="0" algn="ctr">
               <a:buNone/>
             </a:pPr>
             <a:r>
@@ -4828,7 +4605,7 @@
           <a:bodyPr wrap="square" lIns="0" tIns="0" rIns="0" bIns="0" rtlCol="0" anchor="ctr"/>
           <a:lstStyle/>
           <a:p>
-            <a:pPr indent="0" marL="0">
+            <a:pPr marL="0" indent="0">
               <a:buNone/>
             </a:pPr>
             <a:r>
@@ -4864,7 +4641,7 @@
           <a:bodyPr wrap="square" lIns="0" tIns="0" rIns="0" bIns="0" rtlCol="0" anchor="ctr"/>
           <a:lstStyle/>
           <a:p>
-            <a:pPr indent="0" marL="0">
+            <a:pPr marL="0" indent="0">
               <a:buNone/>
             </a:pPr>
             <a:r>
@@ -4881,14 +4658,14 @@
       </p:sp>
       <p:pic>
         <p:nvPicPr>
-          <p:cNvPr id="23" name="Image 0" descr="C:\Users\ACER\Desktop\translation-compiler\report_submission\screenshots\gui_10_run_both.png">    </p:cNvPr>
+          <p:cNvPr id="23" name="Image 0" descr="C:\Users\ACER\Desktop\translation-compiler\report_submission\screenshots\gui_10_run_both.png"/>
           <p:cNvPicPr>
             <a:picLocks noChangeAspect="1"/>
           </p:cNvPicPr>
           <p:nvPr/>
         </p:nvPicPr>
         <p:blipFill>
-          <a:blip r:embed="rId1"/>
+          <a:blip r:embed="rId3"/>
           <a:stretch>
             <a:fillRect/>
           </a:stretch>
@@ -4924,7 +4701,7 @@
           <a:bodyPr wrap="square" lIns="0" tIns="0" rIns="0" bIns="0" rtlCol="0" anchor="ctr"/>
           <a:lstStyle/>
           <a:p>
-            <a:pPr indent="0" marL="0">
+            <a:pPr marL="0" indent="0">
               <a:buNone/>
             </a:pPr>
             <a:r>
@@ -4987,7 +4764,7 @@
           <a:bodyPr wrap="square" lIns="0" tIns="0" rIns="0" bIns="0" rtlCol="0" anchor="ctr"/>
           <a:lstStyle/>
           <a:p>
-            <a:pPr indent="0" marL="0">
+            <a:pPr marL="0" indent="0">
               <a:buNone/>
             </a:pPr>
             <a:r>
@@ -4998,9 +4775,6 @@
               </a:rPr>
               <a:t>DEMO   </a:t>
             </a:r>
-            <a:pPr indent="0" marL="0">
-              <a:buNone/>
-            </a:pPr>
             <a:r>
               <a:rPr lang="en-US" sz="1250" dirty="0">
                 <a:solidFill>
@@ -5015,7 +4789,7 @@
       </p:sp>
       <p:sp>
         <p:nvSpPr>
-          <p:cNvPr id="25" name="Slide Number Placeholder 0"/>
+          <p:cNvPr id="27" name="Slide Number Placeholder 0"/>
           <p:cNvSpPr>
             <a:spLocks noGrp="1"/>
           </p:cNvSpPr>
@@ -5033,7 +4807,7 @@
           </a:prstGeom>
           <a:extLst>
             <a:ext uri="{C572A759-6A51-4108-AA02-DFA0A04FC94B}">
-              <ma14:wrappingTextBoxFlag xmlns:ma14="http://schemas.microsoft.com/office/mac/drawingml/2011/main" val="0"/>
+              <ma14:wrappingTextBoxFlag xmlns:ma14="http://schemas.microsoft.com/office/mac/drawingml/2011/main" xmlns="" val="0"/>
             </a:ext>
           </a:extLst>
         </p:spPr>
@@ -5051,7 +4825,7 @@
           <a:p>
             <a:pPr algn="l"/>
             <a:fld id="{F7021451-1387-4CA6-816F-3879F97B5CBC}" type="slidenum">
-              <a:rPr b="0" lang="en-US"/>
+              <a:rPr lang="en-US" b="0"/>
               <a:t>13</a:t>
             </a:fld>
             <a:endParaRPr lang="en-US"/>
@@ -5086,9 +4860,11 @@
       <p:sp>
         <p:nvSpPr>
           <p:cNvPr id="2" name="Text 0"/>
-          <p:cNvSpPr/>
+          <p:cNvSpPr>
+            <a:spLocks noGrp="1"/>
+          </p:cNvSpPr>
           <p:nvPr>
-            <p:ph idx="100" type="title" hasCustomPrompt="1"/>
+            <p:ph type="title" idx="100" hasCustomPrompt="1"/>
           </p:nvPr>
         </p:nvSpPr>
         <p:spPr>
@@ -5106,7 +4882,7 @@
           <a:bodyPr wrap="square" rtlCol="0"/>
           <a:lstStyle/>
           <a:p>
-            <a:pPr algn="l" indent="0" marL="0">
+            <a:pPr marL="0" indent="0" algn="l">
               <a:buNone/>
             </a:pPr>
             <a:r>
@@ -5124,9 +4900,11 @@
       <p:sp>
         <p:nvSpPr>
           <p:cNvPr id="3" name="Text 0"/>
-          <p:cNvSpPr/>
+          <p:cNvSpPr>
+            <a:spLocks noGrp="1"/>
+          </p:cNvSpPr>
           <p:nvPr>
-            <p:ph idx="101" type="body" hasCustomPrompt="1"/>
+            <p:ph type="body" idx="101" hasCustomPrompt="1"/>
           </p:nvPr>
         </p:nvSpPr>
         <p:spPr>
@@ -5144,7 +4922,7 @@
           <a:bodyPr wrap="square" rtlCol="0"/>
           <a:lstStyle/>
           <a:p>
-            <a:pPr algn="l" indent="0" marL="0">
+            <a:pPr marL="0" indent="0" algn="l">
               <a:buNone/>
             </a:pPr>
             <a:r>
@@ -5179,7 +4957,7 @@
           </a:prstGeom>
           <a:extLst>
             <a:ext uri="{C572A759-6A51-4108-AA02-DFA0A04FC94B}">
-              <ma14:wrappingTextBoxFlag xmlns:ma14="http://schemas.microsoft.com/office/mac/drawingml/2011/main" val="0"/>
+              <ma14:wrappingTextBoxFlag xmlns:ma14="http://schemas.microsoft.com/office/mac/drawingml/2011/main" xmlns="" val="0"/>
             </a:ext>
           </a:extLst>
         </p:spPr>
@@ -5197,7 +4975,7 @@
           <a:p>
             <a:pPr algn="l"/>
             <a:fld id="{F7021451-1387-4CA6-816F-3879F97B5CBC}" type="slidenum">
-              <a:rPr b="0" lang="en-US"/>
+              <a:rPr lang="en-US" b="0"/>
               <a:t>14</a:t>
             </a:fld>
             <a:endParaRPr lang="en-US"/>
@@ -5232,9 +5010,11 @@
       <p:sp>
         <p:nvSpPr>
           <p:cNvPr id="2" name="Text 0"/>
-          <p:cNvSpPr/>
+          <p:cNvSpPr>
+            <a:spLocks noGrp="1"/>
+          </p:cNvSpPr>
           <p:nvPr>
-            <p:ph idx="100" type="title" hasCustomPrompt="1"/>
+            <p:ph type="title" idx="100" hasCustomPrompt="1"/>
           </p:nvPr>
         </p:nvSpPr>
         <p:spPr>
@@ -5252,7 +5032,7 @@
           <a:bodyPr wrap="square" rtlCol="0"/>
           <a:lstStyle/>
           <a:p>
-            <a:pPr algn="l" indent="0" marL="0">
+            <a:pPr marL="0" indent="0" algn="l">
               <a:buNone/>
             </a:pPr>
             <a:r>
@@ -5269,14 +5049,14 @@
       </p:sp>
       <p:pic>
         <p:nvPicPr>
-          <p:cNvPr id="3" name="Image 0" descr="C:\Users\ACER\Desktop\translation-compiler\presentation\screenshots\ppt_01_buffer_handoff.png">    </p:cNvPr>
+          <p:cNvPr id="3" name="Image 0" descr="C:\Users\ACER\Desktop\translation-compiler\presentation\screenshots\ppt_01_buffer_handoff.png"/>
           <p:cNvPicPr>
             <a:picLocks noChangeAspect="1"/>
           </p:cNvPicPr>
           <p:nvPr/>
         </p:nvPicPr>
         <p:blipFill>
-          <a:blip r:embed="rId1"/>
+          <a:blip r:embed="rId3"/>
           <a:stretch>
             <a:fillRect/>
           </a:stretch>
@@ -5445,7 +5225,7 @@
           <a:bodyPr wrap="square" lIns="0" tIns="0" rIns="0" bIns="0" rtlCol="0" anchor="ctr"/>
           <a:lstStyle/>
           <a:p>
-            <a:pPr indent="0" marL="0">
+            <a:pPr marL="0" indent="0">
               <a:buNone/>
             </a:pPr>
             <a:r>
@@ -5456,9 +5236,6 @@
               </a:rPr>
               <a:t>DEMO   </a:t>
             </a:r>
-            <a:pPr indent="0" marL="0">
-              <a:buNone/>
-            </a:pPr>
             <a:r>
               <a:rPr lang="en-US" sz="1250" dirty="0">
                 <a:solidFill>
@@ -5492,7 +5269,7 @@
           <a:bodyPr wrap="square" lIns="0" tIns="0" rIns="0" bIns="0" rtlCol="0" anchor="ctr"/>
           <a:lstStyle/>
           <a:p>
-            <a:pPr indent="0" marL="0">
+            <a:pPr marL="0" indent="0">
               <a:buNone/>
             </a:pPr>
             <a:r>
@@ -5527,7 +5304,7 @@
           </a:prstGeom>
           <a:extLst>
             <a:ext uri="{C572A759-6A51-4108-AA02-DFA0A04FC94B}">
-              <ma14:wrappingTextBoxFlag xmlns:ma14="http://schemas.microsoft.com/office/mac/drawingml/2011/main" val="0"/>
+              <ma14:wrappingTextBoxFlag xmlns:ma14="http://schemas.microsoft.com/office/mac/drawingml/2011/main" xmlns="" val="0"/>
             </a:ext>
           </a:extLst>
         </p:spPr>
@@ -5545,7 +5322,7 @@
           <a:p>
             <a:pPr algn="l"/>
             <a:fld id="{F7021451-1387-4CA6-816F-3879F97B5CBC}" type="slidenum">
-              <a:rPr b="0" lang="en-US"/>
+              <a:rPr lang="en-US" b="0"/>
               <a:t>15</a:t>
             </a:fld>
             <a:endParaRPr lang="en-US"/>
@@ -5580,9 +5357,11 @@
       <p:sp>
         <p:nvSpPr>
           <p:cNvPr id="2" name="Text 0"/>
-          <p:cNvSpPr/>
+          <p:cNvSpPr>
+            <a:spLocks noGrp="1"/>
+          </p:cNvSpPr>
           <p:nvPr>
-            <p:ph idx="100" type="title" hasCustomPrompt="1"/>
+            <p:ph type="title" idx="100" hasCustomPrompt="1"/>
           </p:nvPr>
         </p:nvSpPr>
         <p:spPr>
@@ -5600,7 +5379,7 @@
           <a:bodyPr wrap="square" rtlCol="0"/>
           <a:lstStyle/>
           <a:p>
-            <a:pPr algn="l" indent="0" marL="0">
+            <a:pPr marL="0" indent="0" algn="l">
               <a:buNone/>
             </a:pPr>
             <a:r>
@@ -5617,14 +5396,14 @@
       </p:sp>
       <p:pic>
         <p:nvPicPr>
-          <p:cNvPr id="3" name="Image 0" descr="C:\Users\ACER\Desktop\translation-compiler\presentation\screenshots\ppt_02_converted_verdict.png">    </p:cNvPr>
+          <p:cNvPr id="3" name="Image 0" descr="C:\Users\ACER\Desktop\translation-compiler\presentation\screenshots\ppt_02_converted_verdict.png"/>
           <p:cNvPicPr>
             <a:picLocks noChangeAspect="1"/>
           </p:cNvPicPr>
           <p:nvPr/>
         </p:nvPicPr>
         <p:blipFill>
-          <a:blip r:embed="rId1"/>
+          <a:blip r:embed="rId3"/>
           <a:stretch>
             <a:fillRect/>
           </a:stretch>
@@ -5793,7 +5572,7 @@
           <a:bodyPr wrap="square" lIns="0" tIns="0" rIns="0" bIns="0" rtlCol="0" anchor="ctr"/>
           <a:lstStyle/>
           <a:p>
-            <a:pPr indent="0" marL="0">
+            <a:pPr marL="0" indent="0">
               <a:buNone/>
             </a:pPr>
             <a:r>
@@ -5804,9 +5583,6 @@
               </a:rPr>
               <a:t>DEMO   </a:t>
             </a:r>
-            <a:pPr indent="0" marL="0">
-              <a:buNone/>
-            </a:pPr>
             <a:r>
               <a:rPr lang="en-US" sz="1250" dirty="0">
                 <a:solidFill>
@@ -5840,7 +5616,7 @@
           <a:bodyPr wrap="square" lIns="0" tIns="0" rIns="0" bIns="0" rtlCol="0" anchor="ctr"/>
           <a:lstStyle/>
           <a:p>
-            <a:pPr indent="0" marL="0">
+            <a:pPr marL="0" indent="0">
               <a:buNone/>
             </a:pPr>
             <a:r>
@@ -5875,7 +5651,7 @@
           </a:prstGeom>
           <a:extLst>
             <a:ext uri="{C572A759-6A51-4108-AA02-DFA0A04FC94B}">
-              <ma14:wrappingTextBoxFlag xmlns:ma14="http://schemas.microsoft.com/office/mac/drawingml/2011/main" val="0"/>
+              <ma14:wrappingTextBoxFlag xmlns:ma14="http://schemas.microsoft.com/office/mac/drawingml/2011/main" xmlns="" val="0"/>
             </a:ext>
           </a:extLst>
         </p:spPr>
@@ -5893,7 +5669,7 @@
           <a:p>
             <a:pPr algn="l"/>
             <a:fld id="{F7021451-1387-4CA6-816F-3879F97B5CBC}" type="slidenum">
-              <a:rPr b="0" lang="en-US"/>
+              <a:rPr lang="en-US" b="0"/>
               <a:t>16</a:t>
             </a:fld>
             <a:endParaRPr lang="en-US"/>
@@ -5928,9 +5704,11 @@
       <p:sp>
         <p:nvSpPr>
           <p:cNvPr id="2" name="Text 0"/>
-          <p:cNvSpPr/>
+          <p:cNvSpPr>
+            <a:spLocks noGrp="1"/>
+          </p:cNvSpPr>
           <p:nvPr>
-            <p:ph idx="100" type="title" hasCustomPrompt="1"/>
+            <p:ph type="title" idx="100" hasCustomPrompt="1"/>
           </p:nvPr>
         </p:nvSpPr>
         <p:spPr>
@@ -5948,7 +5726,7 @@
           <a:bodyPr wrap="square" rtlCol="0"/>
           <a:lstStyle/>
           <a:p>
-            <a:pPr algn="l" indent="0" marL="0">
+            <a:pPr marL="0" indent="0" algn="l">
               <a:buNone/>
             </a:pPr>
             <a:r>
@@ -5965,14 +5743,14 @@
       </p:sp>
       <p:pic>
         <p:nvPicPr>
-          <p:cNvPr id="3" name="Image 0" descr="C:\Users\ACER\Desktop\translation-compiler\presentation\screenshots\ppt_03_triple_cube.png">    </p:cNvPr>
+          <p:cNvPr id="3" name="Image 0" descr="C:\Users\ACER\Desktop\translation-compiler\presentation\screenshots\ppt_03_triple_cube.png"/>
           <p:cNvPicPr>
             <a:picLocks noChangeAspect="1"/>
           </p:cNvPicPr>
           <p:nvPr/>
         </p:nvPicPr>
         <p:blipFill>
-          <a:blip r:embed="rId1"/>
+          <a:blip r:embed="rId3"/>
           <a:stretch>
             <a:fillRect/>
           </a:stretch>
@@ -6008,7 +5786,7 @@
           <a:bodyPr wrap="square" lIns="0" tIns="0" rIns="0" bIns="0" rtlCol="0" anchor="ctr"/>
           <a:lstStyle/>
           <a:p>
-            <a:pPr indent="0" marL="0">
+            <a:pPr marL="0" indent="0">
               <a:buNone/>
             </a:pPr>
             <a:r>
@@ -6023,7 +5801,7 @@
             <a:endParaRPr lang="en-US" sz="1500" dirty="0"/>
           </a:p>
           <a:p>
-            <a:pPr indent="0" marL="0">
+            <a:pPr marL="0" indent="0">
               <a:buNone/>
             </a:pPr>
             <a:r>
@@ -6038,7 +5816,7 @@
             <a:endParaRPr lang="en-US" sz="1500" dirty="0"/>
           </a:p>
           <a:p>
-            <a:pPr indent="0" marL="0">
+            <a:pPr marL="0" indent="0">
               <a:buNone/>
             </a:pPr>
             <a:r>
@@ -6053,7 +5831,7 @@
             <a:endParaRPr lang="en-US" sz="1500" dirty="0"/>
           </a:p>
           <a:p>
-            <a:pPr indent="0" marL="0">
+            <a:pPr marL="0" indent="0">
               <a:buNone/>
             </a:pPr>
             <a:r>
@@ -6089,7 +5867,7 @@
           <a:bodyPr wrap="square" lIns="0" tIns="0" rIns="0" bIns="0" rtlCol="0" anchor="ctr"/>
           <a:lstStyle/>
           <a:p>
-            <a:pPr indent="0" marL="0">
+            <a:pPr marL="0" indent="0">
               <a:lnSpc>
                 <a:spcPct val="125000"/>
               </a:lnSpc>
@@ -6110,7 +5888,7 @@
             <a:endParaRPr lang="en-US" sz="1200" dirty="0"/>
           </a:p>
           <a:p>
-            <a:pPr indent="0" marL="0">
+            <a:pPr marL="0" indent="0">
               <a:lnSpc>
                 <a:spcPct val="125000"/>
               </a:lnSpc>
@@ -6131,7 +5909,7 @@
             <a:endParaRPr lang="en-US" sz="1200" dirty="0"/>
           </a:p>
           <a:p>
-            <a:pPr indent="0" marL="0">
+            <a:pPr marL="0" indent="0">
               <a:lnSpc>
                 <a:spcPct val="125000"/>
               </a:lnSpc>
@@ -6152,7 +5930,7 @@
             <a:endParaRPr lang="en-US" sz="1200" dirty="0"/>
           </a:p>
           <a:p>
-            <a:pPr indent="0" marL="0">
+            <a:pPr marL="0" indent="0">
               <a:lnSpc>
                 <a:spcPct val="125000"/>
               </a:lnSpc>
@@ -6173,7 +5951,7 @@
             <a:endParaRPr lang="en-US" sz="1200" dirty="0"/>
           </a:p>
           <a:p>
-            <a:pPr indent="0" marL="0">
+            <a:pPr marL="0" indent="0">
               <a:lnSpc>
                 <a:spcPct val="125000"/>
               </a:lnSpc>
@@ -6242,7 +6020,7 @@
           <a:bodyPr wrap="square" lIns="0" tIns="0" rIns="0" bIns="0" rtlCol="0" anchor="ctr"/>
           <a:lstStyle/>
           <a:p>
-            <a:pPr indent="0" marL="0">
+            <a:pPr marL="0" indent="0">
               <a:buNone/>
             </a:pPr>
             <a:r>
@@ -6253,9 +6031,6 @@
               </a:rPr>
               <a:t>DEMO   </a:t>
             </a:r>
-            <a:pPr indent="0" marL="0">
-              <a:buNone/>
-            </a:pPr>
             <a:r>
               <a:rPr lang="en-US" sz="1250" dirty="0">
                 <a:solidFill>
@@ -6288,7 +6063,7 @@
           </a:prstGeom>
           <a:extLst>
             <a:ext uri="{C572A759-6A51-4108-AA02-DFA0A04FC94B}">
-              <ma14:wrappingTextBoxFlag xmlns:ma14="http://schemas.microsoft.com/office/mac/drawingml/2011/main" val="0"/>
+              <ma14:wrappingTextBoxFlag xmlns:ma14="http://schemas.microsoft.com/office/mac/drawingml/2011/main" xmlns="" val="0"/>
             </a:ext>
           </a:extLst>
         </p:spPr>
@@ -6306,7 +6081,7 @@
           <a:p>
             <a:pPr algn="l"/>
             <a:fld id="{F7021451-1387-4CA6-816F-3879F97B5CBC}" type="slidenum">
-              <a:rPr b="0" lang="en-US"/>
+              <a:rPr lang="en-US" b="0"/>
               <a:t>17</a:t>
             </a:fld>
             <a:endParaRPr lang="en-US"/>
@@ -6341,9 +6116,11 @@
       <p:sp>
         <p:nvSpPr>
           <p:cNvPr id="2" name="Text 0"/>
-          <p:cNvSpPr/>
+          <p:cNvSpPr>
+            <a:spLocks noGrp="1"/>
+          </p:cNvSpPr>
           <p:nvPr>
-            <p:ph idx="100" type="title" hasCustomPrompt="1"/>
+            <p:ph type="title" idx="100" hasCustomPrompt="1"/>
           </p:nvPr>
         </p:nvSpPr>
         <p:spPr>
@@ -6361,7 +6138,7 @@
           <a:bodyPr wrap="square" rtlCol="0"/>
           <a:lstStyle/>
           <a:p>
-            <a:pPr algn="l" indent="0" marL="0">
+            <a:pPr marL="0" indent="0" algn="l">
               <a:buNone/>
             </a:pPr>
             <a:r>
@@ -6392,16 +6169,34 @@
         </p:nvGraphicFramePr>
         <p:xfrm>
           <a:off x="594360" y="1325880"/>
-          <a:ext cx="10972800" cy="914400"/>
+          <a:ext cx="10972800" cy="2179320"/>
         </p:xfrm>
         <a:graphic>
           <a:graphicData uri="http://schemas.openxmlformats.org/drawingml/2006/table">
             <a:tbl>
               <a:tblPr/>
               <a:tblGrid>
-                <a:gridCol w="2286000"/>
-                <a:gridCol w="4572000"/>
-                <a:gridCol w="4114800"/>
+                <a:gridCol w="2286000">
+                  <a:extLst>
+                    <a:ext uri="{9D8B030D-6E8A-4147-A177-3AD203B41FA5}">
+                      <a16:colId xmlns:a16="http://schemas.microsoft.com/office/drawing/2014/main" val="20000"/>
+                    </a:ext>
+                  </a:extLst>
+                </a:gridCol>
+                <a:gridCol w="4572000">
+                  <a:extLst>
+                    <a:ext uri="{9D8B030D-6E8A-4147-A177-3AD203B41FA5}">
+                      <a16:colId xmlns:a16="http://schemas.microsoft.com/office/drawing/2014/main" val="20001"/>
+                    </a:ext>
+                  </a:extLst>
+                </a:gridCol>
+                <a:gridCol w="4114800">
+                  <a:extLst>
+                    <a:ext uri="{9D8B030D-6E8A-4147-A177-3AD203B41FA5}">
+                      <a16:colId xmlns:a16="http://schemas.microsoft.com/office/drawing/2014/main" val="20002"/>
+                    </a:ext>
+                  </a:extLst>
+                </a:gridCol>
               </a:tblGrid>
               <a:tr h="411480">
                 <a:tc>
@@ -6409,7 +6204,7 @@
                     <a:bodyPr/>
                     <a:lstStyle/>
                     <a:p>
-                      <a:pPr indent="0" marL="0">
+                      <a:pPr marL="0" indent="0">
                         <a:buNone/>
                       </a:pPr>
                       <a:r>
@@ -6423,7 +6218,7 @@
                       <a:endParaRPr lang="en-US" sz="1150" dirty="0"/>
                     </a:p>
                   </a:txBody>
-                  <a:tcPr marL="91440" marR="91440" marT="45720" marB="45720" anchor="t">
+                  <a:tcPr>
                     <a:lnL w="12700" cap="flat" cmpd="sng" algn="ctr">
                       <a:solidFill>
                         <a:srgbClr val="DCE3E9"/>
@@ -6470,7 +6265,7 @@
                     <a:bodyPr/>
                     <a:lstStyle/>
                     <a:p>
-                      <a:pPr indent="0" marL="0">
+                      <a:pPr marL="0" indent="0">
                         <a:buNone/>
                       </a:pPr>
                       <a:r>
@@ -6484,7 +6279,7 @@
                       <a:endParaRPr lang="en-US" sz="1150" dirty="0"/>
                     </a:p>
                   </a:txBody>
-                  <a:tcPr marL="91440" marR="91440" marT="45720" marB="45720" anchor="t">
+                  <a:tcPr>
                     <a:lnL w="12700" cap="flat" cmpd="sng" algn="ctr">
                       <a:solidFill>
                         <a:srgbClr val="DCE3E9"/>
@@ -6531,7 +6326,7 @@
                     <a:bodyPr/>
                     <a:lstStyle/>
                     <a:p>
-                      <a:pPr indent="0" marL="0">
+                      <a:pPr marL="0" indent="0">
                         <a:buNone/>
                       </a:pPr>
                       <a:r>
@@ -6545,7 +6340,7 @@
                       <a:endParaRPr lang="en-US" sz="1150" dirty="0"/>
                     </a:p>
                   </a:txBody>
-                  <a:tcPr marL="91440" marR="91440" marT="45720" marB="45720" anchor="t">
+                  <a:tcPr>
                     <a:lnL w="12700" cap="flat" cmpd="sng" algn="ctr">
                       <a:solidFill>
                         <a:srgbClr val="DCE3E9"/>
@@ -6587,6 +6382,11 @@
                     </a:solidFill>
                   </a:tcPr>
                 </a:tc>
+                <a:extLst>
+                  <a:ext uri="{0D108BD9-81ED-4DB2-BD59-A6C34878D82A}">
+                    <a16:rowId xmlns:a16="http://schemas.microsoft.com/office/drawing/2014/main" val="10000"/>
+                  </a:ext>
+                </a:extLst>
               </a:tr>
               <a:tr h="411480">
                 <a:tc>
@@ -6594,7 +6394,7 @@
                     <a:bodyPr/>
                     <a:lstStyle/>
                     <a:p>
-                      <a:pPr indent="0" marL="0">
+                      <a:pPr marL="0" indent="0">
                         <a:buNone/>
                       </a:pPr>
                       <a:r>
@@ -6608,7 +6408,7 @@
                       <a:endParaRPr lang="en-US" sz="1150" dirty="0"/>
                     </a:p>
                     <a:p>
-                      <a:pPr indent="0" marL="0">
+                      <a:pPr marL="0" indent="0">
                         <a:buNone/>
                       </a:pPr>
                       <a:r>
@@ -6622,7 +6422,7 @@
                       <a:endParaRPr lang="en-US" sz="1150" dirty="0"/>
                     </a:p>
                   </a:txBody>
-                  <a:tcPr marL="91440" marR="91440" marT="45720" marB="45720" anchor="t">
+                  <a:tcPr>
                     <a:lnL w="12700" cap="flat" cmpd="sng" algn="ctr">
                       <a:solidFill>
                         <a:srgbClr val="DCE3E9"/>
@@ -6669,7 +6469,7 @@
                     <a:bodyPr/>
                     <a:lstStyle/>
                     <a:p>
-                      <a:pPr indent="0" marL="0">
+                      <a:pPr marL="0" indent="0">
                         <a:buNone/>
                       </a:pPr>
                       <a:r>
@@ -6683,7 +6483,7 @@
                       <a:endParaRPr lang="en-US" sz="1150" dirty="0"/>
                     </a:p>
                   </a:txBody>
-                  <a:tcPr marL="91440" marR="91440" marT="45720" marB="45720" anchor="t">
+                  <a:tcPr>
                     <a:lnL w="12700" cap="flat" cmpd="sng" algn="ctr">
                       <a:solidFill>
                         <a:srgbClr val="DCE3E9"/>
@@ -6730,7 +6530,7 @@
                     <a:bodyPr/>
                     <a:lstStyle/>
                     <a:p>
-                      <a:pPr indent="0" marL="0">
+                      <a:pPr marL="0" indent="0">
                         <a:buNone/>
                       </a:pPr>
                       <a:r>
@@ -6744,7 +6544,7 @@
                       <a:endParaRPr lang="en-US" sz="1150" dirty="0"/>
                     </a:p>
                   </a:txBody>
-                  <a:tcPr marL="91440" marR="91440" marT="45720" marB="45720" anchor="t">
+                  <a:tcPr>
                     <a:lnL w="12700" cap="flat" cmpd="sng" algn="ctr">
                       <a:solidFill>
                         <a:srgbClr val="DCE3E9"/>
@@ -6786,6 +6586,11 @@
                     </a:solidFill>
                   </a:tcPr>
                 </a:tc>
+                <a:extLst>
+                  <a:ext uri="{0D108BD9-81ED-4DB2-BD59-A6C34878D82A}">
+                    <a16:rowId xmlns:a16="http://schemas.microsoft.com/office/drawing/2014/main" val="10001"/>
+                  </a:ext>
+                </a:extLst>
               </a:tr>
               <a:tr h="411480">
                 <a:tc>
@@ -6793,7 +6598,7 @@
                     <a:bodyPr/>
                     <a:lstStyle/>
                     <a:p>
-                      <a:pPr indent="0" marL="0">
+                      <a:pPr marL="0" indent="0">
                         <a:buNone/>
                       </a:pPr>
                       <a:r>
@@ -6807,7 +6612,7 @@
                       <a:endParaRPr lang="en-US" sz="1150" dirty="0"/>
                     </a:p>
                     <a:p>
-                      <a:pPr indent="0" marL="0">
+                      <a:pPr marL="0" indent="0">
                         <a:buNone/>
                       </a:pPr>
                       <a:r>
@@ -6821,7 +6626,7 @@
                       <a:endParaRPr lang="en-US" sz="1150" dirty="0"/>
                     </a:p>
                   </a:txBody>
-                  <a:tcPr marL="91440" marR="91440" marT="45720" marB="45720" anchor="t">
+                  <a:tcPr>
                     <a:lnL w="12700" cap="flat" cmpd="sng" algn="ctr">
                       <a:solidFill>
                         <a:srgbClr val="DCE3E9"/>
@@ -6868,7 +6673,7 @@
                     <a:bodyPr/>
                     <a:lstStyle/>
                     <a:p>
-                      <a:pPr indent="0" marL="0">
+                      <a:pPr marL="0" indent="0">
                         <a:buNone/>
                       </a:pPr>
                       <a:r>
@@ -6882,7 +6687,7 @@
                       <a:endParaRPr lang="en-US" sz="1150" dirty="0"/>
                     </a:p>
                   </a:txBody>
-                  <a:tcPr marL="91440" marR="91440" marT="45720" marB="45720" anchor="t">
+                  <a:tcPr>
                     <a:lnL w="12700" cap="flat" cmpd="sng" algn="ctr">
                       <a:solidFill>
                         <a:srgbClr val="DCE3E9"/>
@@ -6929,7 +6734,7 @@
                     <a:bodyPr/>
                     <a:lstStyle/>
                     <a:p>
-                      <a:pPr indent="0" marL="0">
+                      <a:pPr marL="0" indent="0">
                         <a:buNone/>
                       </a:pPr>
                       <a:r>
@@ -6943,7 +6748,7 @@
                       <a:endParaRPr lang="en-US" sz="1150" dirty="0"/>
                     </a:p>
                   </a:txBody>
-                  <a:tcPr marL="91440" marR="91440" marT="45720" marB="45720" anchor="t">
+                  <a:tcPr>
                     <a:lnL w="12700" cap="flat" cmpd="sng" algn="ctr">
                       <a:solidFill>
                         <a:srgbClr val="DCE3E9"/>
@@ -6985,6 +6790,11 @@
                     </a:solidFill>
                   </a:tcPr>
                 </a:tc>
+                <a:extLst>
+                  <a:ext uri="{0D108BD9-81ED-4DB2-BD59-A6C34878D82A}">
+                    <a16:rowId xmlns:a16="http://schemas.microsoft.com/office/drawing/2014/main" val="10002"/>
+                  </a:ext>
+                </a:extLst>
               </a:tr>
               <a:tr h="411480">
                 <a:tc>
@@ -6992,7 +6802,7 @@
                     <a:bodyPr/>
                     <a:lstStyle/>
                     <a:p>
-                      <a:pPr indent="0" marL="0">
+                      <a:pPr marL="0" indent="0">
                         <a:buNone/>
                       </a:pPr>
                       <a:r>
@@ -7006,7 +6816,7 @@
                       <a:endParaRPr lang="en-US" sz="1150" dirty="0"/>
                     </a:p>
                     <a:p>
-                      <a:pPr indent="0" marL="0">
+                      <a:pPr marL="0" indent="0">
                         <a:buNone/>
                       </a:pPr>
                       <a:r>
@@ -7020,7 +6830,7 @@
                       <a:endParaRPr lang="en-US" sz="1150" dirty="0"/>
                     </a:p>
                   </a:txBody>
-                  <a:tcPr marL="91440" marR="91440" marT="45720" marB="45720" anchor="t">
+                  <a:tcPr>
                     <a:lnL w="12700" cap="flat" cmpd="sng" algn="ctr">
                       <a:solidFill>
                         <a:srgbClr val="DCE3E9"/>
@@ -7067,7 +6877,7 @@
                     <a:bodyPr/>
                     <a:lstStyle/>
                     <a:p>
-                      <a:pPr indent="0" marL="0">
+                      <a:pPr marL="0" indent="0">
                         <a:buNone/>
                       </a:pPr>
                       <a:r>
@@ -7081,7 +6891,7 @@
                       <a:endParaRPr lang="en-US" sz="1150" dirty="0"/>
                     </a:p>
                   </a:txBody>
-                  <a:tcPr marL="91440" marR="91440" marT="45720" marB="45720" anchor="t">
+                  <a:tcPr>
                     <a:lnL w="12700" cap="flat" cmpd="sng" algn="ctr">
                       <a:solidFill>
                         <a:srgbClr val="DCE3E9"/>
@@ -7128,7 +6938,7 @@
                     <a:bodyPr/>
                     <a:lstStyle/>
                     <a:p>
-                      <a:pPr indent="0" marL="0">
+                      <a:pPr marL="0" indent="0">
                         <a:buNone/>
                       </a:pPr>
                       <a:r>
@@ -7142,7 +6952,7 @@
                       <a:endParaRPr lang="en-US" sz="1150" dirty="0"/>
                     </a:p>
                   </a:txBody>
-                  <a:tcPr marL="91440" marR="91440" marT="45720" marB="45720" anchor="t">
+                  <a:tcPr>
                     <a:lnL w="12700" cap="flat" cmpd="sng" algn="ctr">
                       <a:solidFill>
                         <a:srgbClr val="DCE3E9"/>
@@ -7184,6 +6994,11 @@
                     </a:solidFill>
                   </a:tcPr>
                 </a:tc>
+                <a:extLst>
+                  <a:ext uri="{0D108BD9-81ED-4DB2-BD59-A6C34878D82A}">
+                    <a16:rowId xmlns:a16="http://schemas.microsoft.com/office/drawing/2014/main" val="10003"/>
+                  </a:ext>
+                </a:extLst>
               </a:tr>
               <a:tr h="411480">
                 <a:tc>
@@ -7191,7 +7006,7 @@
                     <a:bodyPr/>
                     <a:lstStyle/>
                     <a:p>
-                      <a:pPr indent="0" marL="0">
+                      <a:pPr marL="0" indent="0">
                         <a:buNone/>
                       </a:pPr>
                       <a:r>
@@ -7205,7 +7020,7 @@
                       <a:endParaRPr lang="en-US" sz="1150" dirty="0"/>
                     </a:p>
                     <a:p>
-                      <a:pPr indent="0" marL="0">
+                      <a:pPr marL="0" indent="0">
                         <a:buNone/>
                       </a:pPr>
                       <a:r>
@@ -7219,7 +7034,7 @@
                       <a:endParaRPr lang="en-US" sz="1150" dirty="0"/>
                     </a:p>
                   </a:txBody>
-                  <a:tcPr marL="91440" marR="91440" marT="45720" marB="45720" anchor="t">
+                  <a:tcPr>
                     <a:lnL w="12700" cap="flat" cmpd="sng" algn="ctr">
                       <a:solidFill>
                         <a:srgbClr val="DCE3E9"/>
@@ -7266,7 +7081,7 @@
                     <a:bodyPr/>
                     <a:lstStyle/>
                     <a:p>
-                      <a:pPr indent="0" marL="0">
+                      <a:pPr marL="0" indent="0">
                         <a:buNone/>
                       </a:pPr>
                       <a:r>
@@ -7280,7 +7095,7 @@
                       <a:endParaRPr lang="en-US" sz="1150" dirty="0"/>
                     </a:p>
                   </a:txBody>
-                  <a:tcPr marL="91440" marR="91440" marT="45720" marB="45720" anchor="t">
+                  <a:tcPr>
                     <a:lnL w="12700" cap="flat" cmpd="sng" algn="ctr">
                       <a:solidFill>
                         <a:srgbClr val="DCE3E9"/>
@@ -7327,7 +7142,7 @@
                     <a:bodyPr/>
                     <a:lstStyle/>
                     <a:p>
-                      <a:pPr indent="0" marL="0">
+                      <a:pPr marL="0" indent="0">
                         <a:buNone/>
                       </a:pPr>
                       <a:r>
@@ -7341,7 +7156,7 @@
                       <a:endParaRPr lang="en-US" sz="1150" dirty="0"/>
                     </a:p>
                   </a:txBody>
-                  <a:tcPr marL="91440" marR="91440" marT="45720" marB="45720" anchor="t">
+                  <a:tcPr>
                     <a:lnL w="12700" cap="flat" cmpd="sng" algn="ctr">
                       <a:solidFill>
                         <a:srgbClr val="DCE3E9"/>
@@ -7383,6 +7198,11 @@
                     </a:solidFill>
                   </a:tcPr>
                 </a:tc>
+                <a:extLst>
+                  <a:ext uri="{0D108BD9-81ED-4DB2-BD59-A6C34878D82A}">
+                    <a16:rowId xmlns:a16="http://schemas.microsoft.com/office/drawing/2014/main" val="10004"/>
+                  </a:ext>
+                </a:extLst>
               </a:tr>
             </a:tbl>
           </a:graphicData>
@@ -7436,7 +7256,7 @@
           <a:bodyPr wrap="square" lIns="0" tIns="0" rIns="0" bIns="0" rtlCol="0" anchor="ctr"/>
           <a:lstStyle/>
           <a:p>
-            <a:pPr indent="0" marL="0">
+            <a:pPr marL="0" indent="0">
               <a:buNone/>
             </a:pPr>
             <a:r>
@@ -7451,7 +7271,7 @@
             <a:endParaRPr lang="en-US" sz="1500" dirty="0"/>
           </a:p>
           <a:p>
-            <a:pPr indent="0" marL="0">
+            <a:pPr marL="0" indent="0">
               <a:buNone/>
             </a:pPr>
             <a:r>
@@ -7514,7 +7334,7 @@
           <a:bodyPr wrap="square" lIns="0" tIns="0" rIns="0" bIns="0" rtlCol="0" anchor="ctr"/>
           <a:lstStyle/>
           <a:p>
-            <a:pPr indent="0" marL="0">
+            <a:pPr marL="0" indent="0">
               <a:buNone/>
             </a:pPr>
             <a:r>
@@ -7525,9 +7345,6 @@
               </a:rPr>
               <a:t>DEMO   </a:t>
             </a:r>
-            <a:pPr indent="0" marL="0">
-              <a:buNone/>
-            </a:pPr>
             <a:r>
               <a:rPr lang="en-US" sz="1250" dirty="0">
                 <a:solidFill>
@@ -7560,7 +7377,7 @@
           </a:prstGeom>
           <a:extLst>
             <a:ext uri="{C572A759-6A51-4108-AA02-DFA0A04FC94B}">
-              <ma14:wrappingTextBoxFlag xmlns:ma14="http://schemas.microsoft.com/office/mac/drawingml/2011/main" val="0"/>
+              <ma14:wrappingTextBoxFlag xmlns:ma14="http://schemas.microsoft.com/office/mac/drawingml/2011/main" xmlns="" val="0"/>
             </a:ext>
           </a:extLst>
         </p:spPr>
@@ -7578,7 +7395,7 @@
           <a:p>
             <a:pPr algn="l"/>
             <a:fld id="{F7021451-1387-4CA6-816F-3879F97B5CBC}" type="slidenum">
-              <a:rPr b="0" lang="en-US"/>
+              <a:rPr lang="en-US" b="0"/>
               <a:t>18</a:t>
             </a:fld>
             <a:endParaRPr lang="en-US"/>
@@ -7613,9 +7430,11 @@
       <p:sp>
         <p:nvSpPr>
           <p:cNvPr id="2" name="Text 0"/>
-          <p:cNvSpPr/>
+          <p:cNvSpPr>
+            <a:spLocks noGrp="1"/>
+          </p:cNvSpPr>
           <p:nvPr>
-            <p:ph idx="100" type="title" hasCustomPrompt="1"/>
+            <p:ph type="title" idx="100" hasCustomPrompt="1"/>
           </p:nvPr>
         </p:nvSpPr>
         <p:spPr>
@@ -7633,7 +7452,7 @@
           <a:bodyPr wrap="square" rtlCol="0"/>
           <a:lstStyle/>
           <a:p>
-            <a:pPr algn="l" indent="0" marL="0">
+            <a:pPr marL="0" indent="0" algn="l">
               <a:buNone/>
             </a:pPr>
             <a:r>
@@ -7777,14 +7596,14 @@
       </p:sp>
       <p:pic>
         <p:nvPicPr>
-          <p:cNvPr id="4" name="Image 0" descr="C:\Users\ACER\Desktop\translation-compiler\presentation\screenshots\ppt_04_int64_refused.png">    </p:cNvPr>
+          <p:cNvPr id="4" name="Image 0" descr="C:\Users\ACER\Desktop\translation-compiler\presentation\screenshots\ppt_04_int64_refused.png"/>
           <p:cNvPicPr>
             <a:picLocks noChangeAspect="1"/>
           </p:cNvPicPr>
           <p:nvPr/>
         </p:nvPicPr>
         <p:blipFill>
-          <a:blip r:embed="rId1"/>
+          <a:blip r:embed="rId3"/>
           <a:stretch>
             <a:fillRect/>
           </a:stretch>
@@ -7820,7 +7639,7 @@
           <a:bodyPr wrap="square" lIns="0" tIns="0" rIns="0" bIns="0" rtlCol="0" anchor="ctr"/>
           <a:lstStyle/>
           <a:p>
-            <a:pPr indent="0" marL="0">
+            <a:pPr marL="0" indent="0">
               <a:buNone/>
             </a:pPr>
             <a:r>
@@ -7855,7 +7674,7 @@
           </a:prstGeom>
           <a:extLst>
             <a:ext uri="{C572A759-6A51-4108-AA02-DFA0A04FC94B}">
-              <ma14:wrappingTextBoxFlag xmlns:ma14="http://schemas.microsoft.com/office/mac/drawingml/2011/main" val="0"/>
+              <ma14:wrappingTextBoxFlag xmlns:ma14="http://schemas.microsoft.com/office/mac/drawingml/2011/main" xmlns="" val="0"/>
             </a:ext>
           </a:extLst>
         </p:spPr>
@@ -7873,7 +7692,7 @@
           <a:p>
             <a:pPr algn="l"/>
             <a:fld id="{F7021451-1387-4CA6-816F-3879F97B5CBC}" type="slidenum">
-              <a:rPr b="0" lang="en-US"/>
+              <a:rPr lang="en-US" b="0"/>
               <a:t>19</a:t>
             </a:fld>
             <a:endParaRPr lang="en-US"/>
@@ -7908,9 +7727,11 @@
       <p:sp>
         <p:nvSpPr>
           <p:cNvPr id="2" name="Text 0"/>
-          <p:cNvSpPr/>
+          <p:cNvSpPr>
+            <a:spLocks noGrp="1"/>
+          </p:cNvSpPr>
           <p:nvPr>
-            <p:ph idx="100" type="title" hasCustomPrompt="1"/>
+            <p:ph type="title" idx="100" hasCustomPrompt="1"/>
           </p:nvPr>
         </p:nvSpPr>
         <p:spPr>
@@ -7928,7 +7749,7 @@
           <a:bodyPr wrap="square" rtlCol="0"/>
           <a:lstStyle/>
           <a:p>
-            <a:pPr algn="l" indent="0" marL="0">
+            <a:pPr marL="0" indent="0" algn="l">
               <a:buNone/>
             </a:pPr>
             <a:r>
@@ -7946,9 +7767,11 @@
       <p:sp>
         <p:nvSpPr>
           <p:cNvPr id="3" name="Text 0"/>
-          <p:cNvSpPr/>
+          <p:cNvSpPr>
+            <a:spLocks noGrp="1"/>
+          </p:cNvSpPr>
           <p:nvPr>
-            <p:ph idx="101" type="body" hasCustomPrompt="1"/>
+            <p:ph type="body" idx="101" hasCustomPrompt="1"/>
           </p:nvPr>
         </p:nvSpPr>
         <p:spPr>
@@ -7966,7 +7789,7 @@
           <a:bodyPr wrap="square" rtlCol="0"/>
           <a:lstStyle/>
           <a:p>
-            <a:pPr algn="l" indent="0" marL="0">
+            <a:pPr marL="0" indent="0" algn="l">
               <a:buNone/>
             </a:pPr>
             <a:r>
@@ -8001,7 +7824,7 @@
           </a:prstGeom>
           <a:extLst>
             <a:ext uri="{C572A759-6A51-4108-AA02-DFA0A04FC94B}">
-              <ma14:wrappingTextBoxFlag xmlns:ma14="http://schemas.microsoft.com/office/mac/drawingml/2011/main" val="0"/>
+              <ma14:wrappingTextBoxFlag xmlns:ma14="http://schemas.microsoft.com/office/mac/drawingml/2011/main" xmlns="" val="0"/>
             </a:ext>
           </a:extLst>
         </p:spPr>
@@ -8019,7 +7842,7 @@
           <a:p>
             <a:pPr algn="l"/>
             <a:fld id="{F7021451-1387-4CA6-816F-3879F97B5CBC}" type="slidenum">
-              <a:rPr b="0" lang="en-US"/>
+              <a:rPr lang="en-US" b="0"/>
               <a:t>2</a:t>
             </a:fld>
             <a:endParaRPr lang="en-US"/>
@@ -8054,9 +7877,11 @@
       <p:sp>
         <p:nvSpPr>
           <p:cNvPr id="2" name="Text 0"/>
-          <p:cNvSpPr/>
+          <p:cNvSpPr>
+            <a:spLocks noGrp="1"/>
+          </p:cNvSpPr>
           <p:nvPr>
-            <p:ph idx="100" type="title" hasCustomPrompt="1"/>
+            <p:ph type="title" idx="100" hasCustomPrompt="1"/>
           </p:nvPr>
         </p:nvSpPr>
         <p:spPr>
@@ -8074,7 +7899,7 @@
           <a:bodyPr wrap="square" rtlCol="0"/>
           <a:lstStyle/>
           <a:p>
-            <a:pPr algn="l" indent="0" marL="0">
+            <a:pPr marL="0" indent="0" algn="l">
               <a:buNone/>
             </a:pPr>
             <a:r>
@@ -8110,7 +7935,7 @@
           <a:bodyPr wrap="square" lIns="0" tIns="0" rIns="0" bIns="0" rtlCol="0" anchor="ctr"/>
           <a:lstStyle/>
           <a:p>
-            <a:pPr indent="0" marL="0">
+            <a:pPr marL="0" indent="0">
               <a:buNone/>
             </a:pPr>
             <a:r>
@@ -8146,7 +7971,7 @@
           <a:bodyPr wrap="square" lIns="0" tIns="0" rIns="0" bIns="0" rtlCol="0" anchor="ctr"/>
           <a:lstStyle/>
           <a:p>
-            <a:pPr indent="0" marL="0">
+            <a:pPr marL="0" indent="0">
               <a:buNone/>
             </a:pPr>
             <a:r>
@@ -8160,7 +7985,7 @@
             <a:endParaRPr lang="en-US" sz="1200" dirty="0"/>
           </a:p>
           <a:p>
-            <a:pPr indent="0" marL="0">
+            <a:pPr marL="0" indent="0">
               <a:buNone/>
             </a:pPr>
             <a:r>
@@ -8196,7 +8021,7 @@
           <a:bodyPr wrap="square" lIns="0" tIns="0" rIns="0" bIns="0" rtlCol="0" anchor="ctr"/>
           <a:lstStyle/>
           <a:p>
-            <a:pPr indent="0" marL="0">
+            <a:pPr marL="0" indent="0">
               <a:buNone/>
             </a:pPr>
             <a:r>
@@ -8232,7 +8057,7 @@
           <a:bodyPr wrap="square" lIns="0" tIns="0" rIns="0" bIns="0" rtlCol="0" anchor="ctr"/>
           <a:lstStyle/>
           <a:p>
-            <a:pPr indent="0" marL="0">
+            <a:pPr marL="0" indent="0">
               <a:buNone/>
             </a:pPr>
             <a:r>
@@ -8246,7 +8071,7 @@
             <a:endParaRPr lang="en-US" sz="1200" dirty="0"/>
           </a:p>
           <a:p>
-            <a:pPr indent="0" marL="0">
+            <a:pPr marL="0" indent="0">
               <a:buNone/>
             </a:pPr>
             <a:r>
@@ -8282,7 +8107,7 @@
           <a:bodyPr wrap="square" lIns="0" tIns="0" rIns="0" bIns="0" rtlCol="0" anchor="ctr"/>
           <a:lstStyle/>
           <a:p>
-            <a:pPr indent="0" marL="0">
+            <a:pPr marL="0" indent="0">
               <a:buNone/>
             </a:pPr>
             <a:r>
@@ -8318,7 +8143,7 @@
           <a:bodyPr wrap="square" lIns="0" tIns="0" rIns="0" bIns="0" rtlCol="0" anchor="ctr"/>
           <a:lstStyle/>
           <a:p>
-            <a:pPr indent="0" marL="0">
+            <a:pPr marL="0" indent="0">
               <a:buNone/>
             </a:pPr>
             <a:r>
@@ -8332,7 +8157,7 @@
             <a:endParaRPr lang="en-US" sz="1200" dirty="0"/>
           </a:p>
           <a:p>
-            <a:pPr indent="0" marL="0">
+            <a:pPr marL="0" indent="0">
               <a:buNone/>
             </a:pPr>
             <a:r>
@@ -8368,7 +8193,7 @@
           <a:bodyPr wrap="square" lIns="0" tIns="0" rIns="0" bIns="0" rtlCol="0" anchor="ctr"/>
           <a:lstStyle/>
           <a:p>
-            <a:pPr indent="0" marL="0">
+            <a:pPr marL="0" indent="0">
               <a:buNone/>
             </a:pPr>
             <a:r>
@@ -8404,7 +8229,7 @@
           <a:bodyPr wrap="square" lIns="0" tIns="0" rIns="0" bIns="0" rtlCol="0" anchor="ctr"/>
           <a:lstStyle/>
           <a:p>
-            <a:pPr indent="0" marL="0">
+            <a:pPr marL="0" indent="0">
               <a:buNone/>
             </a:pPr>
             <a:r>
@@ -8418,7 +8243,7 @@
             <a:endParaRPr lang="en-US" sz="1200" dirty="0"/>
           </a:p>
           <a:p>
-            <a:pPr indent="0" marL="0">
+            <a:pPr marL="0" indent="0">
               <a:buNone/>
             </a:pPr>
             <a:r>
@@ -8481,7 +8306,7 @@
           <a:bodyPr wrap="square" lIns="0" tIns="0" rIns="0" bIns="0" rtlCol="0" anchor="ctr"/>
           <a:lstStyle/>
           <a:p>
-            <a:pPr indent="0" marL="0">
+            <a:pPr marL="0" indent="0">
               <a:buNone/>
             </a:pPr>
             <a:r>
@@ -8496,7 +8321,7 @@
             <a:endParaRPr lang="en-US" sz="1500" dirty="0"/>
           </a:p>
           <a:p>
-            <a:pPr indent="0" marL="0">
+            <a:pPr marL="0" indent="0">
               <a:buNone/>
             </a:pPr>
             <a:r>
@@ -8559,7 +8384,7 @@
           <a:bodyPr wrap="square" lIns="0" tIns="0" rIns="0" bIns="0" rtlCol="0" anchor="ctr"/>
           <a:lstStyle/>
           <a:p>
-            <a:pPr indent="0" marL="0">
+            <a:pPr marL="0" indent="0">
               <a:buNone/>
             </a:pPr>
             <a:r>
@@ -8570,9 +8395,6 @@
               </a:rPr>
               <a:t>DEMO   </a:t>
             </a:r>
-            <a:pPr indent="0" marL="0">
-              <a:buNone/>
-            </a:pPr>
             <a:r>
               <a:rPr lang="en-US" sz="1250" dirty="0">
                 <a:solidFill>
@@ -8605,7 +8427,7 @@
           </a:prstGeom>
           <a:extLst>
             <a:ext uri="{C572A759-6A51-4108-AA02-DFA0A04FC94B}">
-              <ma14:wrappingTextBoxFlag xmlns:ma14="http://schemas.microsoft.com/office/mac/drawingml/2011/main" val="0"/>
+              <ma14:wrappingTextBoxFlag xmlns:ma14="http://schemas.microsoft.com/office/mac/drawingml/2011/main" xmlns="" val="0"/>
             </a:ext>
           </a:extLst>
         </p:spPr>
@@ -8623,7 +8445,7 @@
           <a:p>
             <a:pPr algn="l"/>
             <a:fld id="{F7021451-1387-4CA6-816F-3879F97B5CBC}" type="slidenum">
-              <a:rPr b="0" lang="en-US"/>
+              <a:rPr lang="en-US" b="0"/>
               <a:t>20</a:t>
             </a:fld>
             <a:endParaRPr lang="en-US"/>
@@ -8658,9 +8480,11 @@
       <p:sp>
         <p:nvSpPr>
           <p:cNvPr id="2" name="Text 0"/>
-          <p:cNvSpPr/>
+          <p:cNvSpPr>
+            <a:spLocks noGrp="1"/>
+          </p:cNvSpPr>
           <p:nvPr>
-            <p:ph idx="100" type="title" hasCustomPrompt="1"/>
+            <p:ph type="title" idx="100" hasCustomPrompt="1"/>
           </p:nvPr>
         </p:nvSpPr>
         <p:spPr>
@@ -8678,7 +8502,7 @@
           <a:bodyPr wrap="square" rtlCol="0"/>
           <a:lstStyle/>
           <a:p>
-            <a:pPr algn="l" indent="0" marL="0">
+            <a:pPr marL="0" indent="0" algn="l">
               <a:buNone/>
             </a:pPr>
             <a:r>
@@ -8847,7 +8671,7 @@
           <a:bodyPr wrap="square" lIns="0" tIns="0" rIns="0" bIns="0" rtlCol="0" anchor="ctr"/>
           <a:lstStyle/>
           <a:p>
-            <a:pPr indent="0" marL="0">
+            <a:pPr marL="0" indent="0">
               <a:lnSpc>
                 <a:spcPct val="112000"/>
               </a:lnSpc>
@@ -8867,7 +8691,7 @@
             <a:endParaRPr lang="en-US" sz="1150" dirty="0"/>
           </a:p>
           <a:p>
-            <a:pPr indent="0" marL="0">
+            <a:pPr marL="0" indent="0">
               <a:lnSpc>
                 <a:spcPct val="112000"/>
               </a:lnSpc>
@@ -8887,7 +8711,7 @@
             <a:endParaRPr lang="en-US" sz="1150" dirty="0"/>
           </a:p>
           <a:p>
-            <a:pPr indent="0" marL="0">
+            <a:pPr marL="0" indent="0">
               <a:lnSpc>
                 <a:spcPct val="112000"/>
               </a:lnSpc>
@@ -8907,7 +8731,7 @@
             <a:endParaRPr lang="en-US" sz="1150" dirty="0"/>
           </a:p>
           <a:p>
-            <a:pPr indent="0" marL="0">
+            <a:pPr marL="0" indent="0">
               <a:lnSpc>
                 <a:spcPct val="112000"/>
               </a:lnSpc>
@@ -8927,7 +8751,7 @@
             <a:endParaRPr lang="en-US" sz="1150" dirty="0"/>
           </a:p>
           <a:p>
-            <a:pPr indent="0" marL="0">
+            <a:pPr marL="0" indent="0">
               <a:lnSpc>
                 <a:spcPct val="112000"/>
               </a:lnSpc>
@@ -8947,7 +8771,7 @@
             <a:endParaRPr lang="en-US" sz="1150" dirty="0"/>
           </a:p>
           <a:p>
-            <a:pPr indent="0" marL="0">
+            <a:pPr marL="0" indent="0">
               <a:lnSpc>
                 <a:spcPct val="112000"/>
               </a:lnSpc>
@@ -9016,7 +8840,7 @@
           <a:bodyPr wrap="square" lIns="0" tIns="0" rIns="0" bIns="0" rtlCol="0" anchor="ctr"/>
           <a:lstStyle/>
           <a:p>
-            <a:pPr indent="0" marL="0">
+            <a:pPr marL="0" indent="0">
               <a:lnSpc>
                 <a:spcPct val="112000"/>
               </a:lnSpc>
@@ -9036,7 +8860,7 @@
             <a:endParaRPr lang="en-US" sz="1150" dirty="0"/>
           </a:p>
           <a:p>
-            <a:pPr indent="0" marL="0">
+            <a:pPr marL="0" indent="0">
               <a:lnSpc>
                 <a:spcPct val="112000"/>
               </a:lnSpc>
@@ -9056,7 +8880,7 @@
             <a:endParaRPr lang="en-US" sz="1150" dirty="0"/>
           </a:p>
           <a:p>
-            <a:pPr indent="0" marL="0">
+            <a:pPr marL="0" indent="0">
               <a:lnSpc>
                 <a:spcPct val="112000"/>
               </a:lnSpc>
@@ -9076,7 +8900,7 @@
             <a:endParaRPr lang="en-US" sz="1150" dirty="0"/>
           </a:p>
           <a:p>
-            <a:pPr indent="0" marL="0">
+            <a:pPr marL="0" indent="0">
               <a:lnSpc>
                 <a:spcPct val="112000"/>
               </a:lnSpc>
@@ -9145,7 +8969,7 @@
           <a:bodyPr wrap="square" lIns="0" tIns="0" rIns="0" bIns="0" rtlCol="0" anchor="ctr"/>
           <a:lstStyle/>
           <a:p>
-            <a:pPr indent="0" marL="0">
+            <a:pPr marL="0" indent="0">
               <a:buNone/>
             </a:pPr>
             <a:r>
@@ -9156,9 +8980,6 @@
               </a:rPr>
               <a:t>DEMO   </a:t>
             </a:r>
-            <a:pPr indent="0" marL="0">
-              <a:buNone/>
-            </a:pPr>
             <a:r>
               <a:rPr lang="en-US" sz="1250" dirty="0">
                 <a:solidFill>
@@ -9191,7 +9012,7 @@
           </a:prstGeom>
           <a:extLst>
             <a:ext uri="{C572A759-6A51-4108-AA02-DFA0A04FC94B}">
-              <ma14:wrappingTextBoxFlag xmlns:ma14="http://schemas.microsoft.com/office/mac/drawingml/2011/main" val="0"/>
+              <ma14:wrappingTextBoxFlag xmlns:ma14="http://schemas.microsoft.com/office/mac/drawingml/2011/main" xmlns="" val="0"/>
             </a:ext>
           </a:extLst>
         </p:spPr>
@@ -9209,7 +9030,7 @@
           <a:p>
             <a:pPr algn="l"/>
             <a:fld id="{F7021451-1387-4CA6-816F-3879F97B5CBC}" type="slidenum">
-              <a:rPr b="0" lang="en-US"/>
+              <a:rPr lang="en-US" b="0"/>
               <a:t>3</a:t>
             </a:fld>
             <a:endParaRPr lang="en-US"/>
@@ -9244,9 +9065,11 @@
       <p:sp>
         <p:nvSpPr>
           <p:cNvPr id="2" name="Text 0"/>
-          <p:cNvSpPr/>
+          <p:cNvSpPr>
+            <a:spLocks noGrp="1"/>
+          </p:cNvSpPr>
           <p:nvPr>
-            <p:ph idx="100" type="title" hasCustomPrompt="1"/>
+            <p:ph type="title" idx="100" hasCustomPrompt="1"/>
           </p:nvPr>
         </p:nvSpPr>
         <p:spPr>
@@ -9264,7 +9087,7 @@
           <a:bodyPr wrap="square" rtlCol="0"/>
           <a:lstStyle/>
           <a:p>
-            <a:pPr algn="l" indent="0" marL="0">
+            <a:pPr marL="0" indent="0" algn="l">
               <a:buNone/>
             </a:pPr>
             <a:r>
@@ -9325,7 +9148,7 @@
           <a:bodyPr wrap="square" lIns="0" tIns="0" rIns="0" bIns="0" rtlCol="0" anchor="ctr"/>
           <a:lstStyle/>
           <a:p>
-            <a:pPr algn="ctr" indent="0" marL="0">
+            <a:pPr marL="0" indent="0" algn="ctr">
               <a:buNone/>
             </a:pPr>
             <a:r>
@@ -9361,7 +9184,7 @@
           <a:bodyPr wrap="square" lIns="0" tIns="0" rIns="0" bIns="0" rtlCol="0" anchor="ctr"/>
           <a:lstStyle/>
           <a:p>
-            <a:pPr indent="0" marL="0">
+            <a:pPr marL="0" indent="0">
               <a:buNone/>
             </a:pPr>
             <a:r>
@@ -9397,7 +9220,7 @@
           <a:bodyPr wrap="square" lIns="0" tIns="0" rIns="0" bIns="0" rtlCol="0" anchor="ctr"/>
           <a:lstStyle/>
           <a:p>
-            <a:pPr indent="0" marL="0">
+            <a:pPr marL="0" indent="0">
               <a:buNone/>
             </a:pPr>
             <a:r>
@@ -9458,7 +9281,7 @@
           <a:bodyPr wrap="square" lIns="0" tIns="0" rIns="0" bIns="0" rtlCol="0" anchor="ctr"/>
           <a:lstStyle/>
           <a:p>
-            <a:pPr algn="ctr" indent="0" marL="0">
+            <a:pPr marL="0" indent="0" algn="ctr">
               <a:buNone/>
             </a:pPr>
             <a:r>
@@ -9494,7 +9317,7 @@
           <a:bodyPr wrap="square" lIns="0" tIns="0" rIns="0" bIns="0" rtlCol="0" anchor="ctr"/>
           <a:lstStyle/>
           <a:p>
-            <a:pPr indent="0" marL="0">
+            <a:pPr marL="0" indent="0">
               <a:buNone/>
             </a:pPr>
             <a:r>
@@ -9530,7 +9353,7 @@
           <a:bodyPr wrap="square" lIns="0" tIns="0" rIns="0" bIns="0" rtlCol="0" anchor="ctr"/>
           <a:lstStyle/>
           <a:p>
-            <a:pPr indent="0" marL="0">
+            <a:pPr marL="0" indent="0">
               <a:buNone/>
             </a:pPr>
             <a:r>
@@ -9591,7 +9414,7 @@
           <a:bodyPr wrap="square" lIns="0" tIns="0" rIns="0" bIns="0" rtlCol="0" anchor="ctr"/>
           <a:lstStyle/>
           <a:p>
-            <a:pPr algn="ctr" indent="0" marL="0">
+            <a:pPr marL="0" indent="0" algn="ctr">
               <a:buNone/>
             </a:pPr>
             <a:r>
@@ -9627,7 +9450,7 @@
           <a:bodyPr wrap="square" lIns="0" tIns="0" rIns="0" bIns="0" rtlCol="0" anchor="ctr"/>
           <a:lstStyle/>
           <a:p>
-            <a:pPr indent="0" marL="0">
+            <a:pPr marL="0" indent="0">
               <a:buNone/>
             </a:pPr>
             <a:r>
@@ -9663,7 +9486,7 @@
           <a:bodyPr wrap="square" lIns="0" tIns="0" rIns="0" bIns="0" rtlCol="0" anchor="ctr"/>
           <a:lstStyle/>
           <a:p>
-            <a:pPr indent="0" marL="0">
+            <a:pPr marL="0" indent="0">
               <a:buNone/>
             </a:pPr>
             <a:r>
@@ -9724,7 +9547,7 @@
           <a:bodyPr wrap="square" lIns="0" tIns="0" rIns="0" bIns="0" rtlCol="0" anchor="ctr"/>
           <a:lstStyle/>
           <a:p>
-            <a:pPr algn="ctr" indent="0" marL="0">
+            <a:pPr marL="0" indent="0" algn="ctr">
               <a:buNone/>
             </a:pPr>
             <a:r>
@@ -9760,7 +9583,7 @@
           <a:bodyPr wrap="square" lIns="0" tIns="0" rIns="0" bIns="0" rtlCol="0" anchor="ctr"/>
           <a:lstStyle/>
           <a:p>
-            <a:pPr indent="0" marL="0">
+            <a:pPr marL="0" indent="0">
               <a:buNone/>
             </a:pPr>
             <a:r>
@@ -9796,7 +9619,7 @@
           <a:bodyPr wrap="square" lIns="0" tIns="0" rIns="0" bIns="0" rtlCol="0" anchor="ctr"/>
           <a:lstStyle/>
           <a:p>
-            <a:pPr indent="0" marL="0">
+            <a:pPr marL="0" indent="0">
               <a:buNone/>
             </a:pPr>
             <a:r>
@@ -9857,7 +9680,7 @@
           <a:bodyPr wrap="square" lIns="0" tIns="0" rIns="0" bIns="0" rtlCol="0" anchor="ctr"/>
           <a:lstStyle/>
           <a:p>
-            <a:pPr algn="ctr" indent="0" marL="0">
+            <a:pPr marL="0" indent="0" algn="ctr">
               <a:buNone/>
             </a:pPr>
             <a:r>
@@ -9893,7 +9716,7 @@
           <a:bodyPr wrap="square" lIns="0" tIns="0" rIns="0" bIns="0" rtlCol="0" anchor="ctr"/>
           <a:lstStyle/>
           <a:p>
-            <a:pPr indent="0" marL="0">
+            <a:pPr marL="0" indent="0">
               <a:buNone/>
             </a:pPr>
             <a:r>
@@ -9929,7 +9752,7 @@
           <a:bodyPr wrap="square" lIns="0" tIns="0" rIns="0" bIns="0" rtlCol="0" anchor="ctr"/>
           <a:lstStyle/>
           <a:p>
-            <a:pPr indent="0" marL="0">
+            <a:pPr marL="0" indent="0">
               <a:buNone/>
             </a:pPr>
             <a:r>
@@ -9992,7 +9815,7 @@
           <a:bodyPr wrap="square" lIns="0" tIns="0" rIns="0" bIns="0" rtlCol="0" anchor="ctr"/>
           <a:lstStyle/>
           <a:p>
-            <a:pPr indent="0" marL="0">
+            <a:pPr marL="0" indent="0">
               <a:buNone/>
             </a:pPr>
             <a:r>
@@ -10007,7 +9830,7 @@
             <a:endParaRPr lang="en-US" sz="1500" dirty="0"/>
           </a:p>
           <a:p>
-            <a:pPr indent="0" marL="0">
+            <a:pPr marL="0" indent="0">
               <a:buNone/>
             </a:pPr>
             <a:r>
@@ -10043,7 +9866,7 @@
           <a:bodyPr wrap="square" lIns="0" tIns="0" rIns="0" bIns="0" rtlCol="0" anchor="ctr"/>
           <a:lstStyle/>
           <a:p>
-            <a:pPr indent="0" marL="0">
+            <a:pPr marL="0" indent="0">
               <a:buNone/>
             </a:pPr>
             <a:r>
@@ -10106,7 +9929,7 @@
           <a:bodyPr wrap="square" lIns="0" tIns="0" rIns="0" bIns="0" rtlCol="0" anchor="ctr"/>
           <a:lstStyle/>
           <a:p>
-            <a:pPr indent="0" marL="0">
+            <a:pPr marL="0" indent="0">
               <a:buNone/>
             </a:pPr>
             <a:r>
@@ -10117,9 +9940,6 @@
               </a:rPr>
               <a:t>DEMO   </a:t>
             </a:r>
-            <a:pPr indent="0" marL="0">
-              <a:buNone/>
-            </a:pPr>
             <a:r>
               <a:rPr lang="en-US" sz="1250" dirty="0">
                 <a:solidFill>
@@ -10134,7 +9954,7 @@
       </p:sp>
       <p:sp>
         <p:nvSpPr>
-          <p:cNvPr id="25" name="Slide Number Placeholder 0"/>
+          <p:cNvPr id="28" name="Slide Number Placeholder 0"/>
           <p:cNvSpPr>
             <a:spLocks noGrp="1"/>
           </p:cNvSpPr>
@@ -10152,7 +9972,7 @@
           </a:prstGeom>
           <a:extLst>
             <a:ext uri="{C572A759-6A51-4108-AA02-DFA0A04FC94B}">
-              <ma14:wrappingTextBoxFlag xmlns:ma14="http://schemas.microsoft.com/office/mac/drawingml/2011/main" val="0"/>
+              <ma14:wrappingTextBoxFlag xmlns:ma14="http://schemas.microsoft.com/office/mac/drawingml/2011/main" xmlns="" val="0"/>
             </a:ext>
           </a:extLst>
         </p:spPr>
@@ -10170,7 +9990,7 @@
           <a:p>
             <a:pPr algn="l"/>
             <a:fld id="{F7021451-1387-4CA6-816F-3879F97B5CBC}" type="slidenum">
-              <a:rPr b="0" lang="en-US"/>
+              <a:rPr lang="en-US" b="0"/>
               <a:t>4</a:t>
             </a:fld>
             <a:endParaRPr lang="en-US"/>
@@ -10205,9 +10025,11 @@
       <p:sp>
         <p:nvSpPr>
           <p:cNvPr id="2" name="Text 0"/>
-          <p:cNvSpPr/>
+          <p:cNvSpPr>
+            <a:spLocks noGrp="1"/>
+          </p:cNvSpPr>
           <p:nvPr>
-            <p:ph idx="100" type="title" hasCustomPrompt="1"/>
+            <p:ph type="title" idx="100" hasCustomPrompt="1"/>
           </p:nvPr>
         </p:nvSpPr>
         <p:spPr>
@@ -10225,7 +10047,7 @@
           <a:bodyPr wrap="square" rtlCol="0"/>
           <a:lstStyle/>
           <a:p>
-            <a:pPr algn="l" indent="0" marL="0">
+            <a:pPr marL="0" indent="0" algn="l">
               <a:buNone/>
             </a:pPr>
             <a:r>
@@ -10242,14 +10064,14 @@
       </p:sp>
       <p:pic>
         <p:nvPicPr>
-          <p:cNvPr id="3" name="Image 0" descr="C:\Users\ACER\Desktop\translation-compiler\report_submission\screenshots\gui_02_stage_lexer.png">    </p:cNvPr>
+          <p:cNvPr id="3" name="Image 0" descr="C:\Users\ACER\Desktop\translation-compiler\report_submission\screenshots\gui_02_stage_lexer.png"/>
           <p:cNvPicPr>
             <a:picLocks noChangeAspect="1"/>
           </p:cNvPicPr>
           <p:nvPr/>
         </p:nvPicPr>
         <p:blipFill>
-          <a:blip r:embed="rId1"/>
+          <a:blip r:embed="rId3"/>
           <a:stretch>
             <a:fillRect/>
           </a:stretch>
@@ -10266,14 +10088,14 @@
       </p:pic>
       <p:pic>
         <p:nvPicPr>
-          <p:cNvPr id="4" name="Image 1" descr="C:\Users\ACER\Desktop\translation-compiler\report_submission\screenshots\gui_03_stage_parser.png">    </p:cNvPr>
+          <p:cNvPr id="4" name="Image 1" descr="C:\Users\ACER\Desktop\translation-compiler\report_submission\screenshots\gui_03_stage_parser.png"/>
           <p:cNvPicPr>
             <a:picLocks noChangeAspect="1"/>
           </p:cNvPicPr>
           <p:nvPr/>
         </p:nvPicPr>
         <p:blipFill>
-          <a:blip r:embed="rId2"/>
+          <a:blip r:embed="rId4"/>
           <a:stretch>
             <a:fillRect/>
           </a:stretch>
@@ -10309,7 +10131,7 @@
           <a:bodyPr wrap="square" lIns="0" tIns="0" rIns="0" bIns="0" rtlCol="0" anchor="ctr"/>
           <a:lstStyle/>
           <a:p>
-            <a:pPr indent="0" marL="0">
+            <a:pPr marL="0" indent="0">
               <a:buNone/>
             </a:pPr>
             <a:r>
@@ -10345,7 +10167,7 @@
           <a:bodyPr wrap="square" lIns="0" tIns="0" rIns="0" bIns="0" rtlCol="0" anchor="ctr"/>
           <a:lstStyle/>
           <a:p>
-            <a:pPr indent="0" marL="0">
+            <a:pPr marL="0" indent="0">
               <a:buNone/>
             </a:pPr>
             <a:r>
@@ -10536,7 +10358,7 @@
           <a:bodyPr wrap="square" lIns="0" tIns="0" rIns="0" bIns="0" rtlCol="0" anchor="ctr"/>
           <a:lstStyle/>
           <a:p>
-            <a:pPr indent="0" marL="0">
+            <a:pPr marL="0" indent="0">
               <a:buNone/>
             </a:pPr>
             <a:r>
@@ -10547,9 +10369,6 @@
               </a:rPr>
               <a:t>DEMO   </a:t>
             </a:r>
-            <a:pPr indent="0" marL="0">
-              <a:buNone/>
-            </a:pPr>
             <a:r>
               <a:rPr lang="en-US" sz="1250" dirty="0">
                 <a:solidFill>
@@ -10582,7 +10401,7 @@
           </a:prstGeom>
           <a:extLst>
             <a:ext uri="{C572A759-6A51-4108-AA02-DFA0A04FC94B}">
-              <ma14:wrappingTextBoxFlag xmlns:ma14="http://schemas.microsoft.com/office/mac/drawingml/2011/main" val="0"/>
+              <ma14:wrappingTextBoxFlag xmlns:ma14="http://schemas.microsoft.com/office/mac/drawingml/2011/main" xmlns="" val="0"/>
             </a:ext>
           </a:extLst>
         </p:spPr>
@@ -10600,7 +10419,7 @@
           <a:p>
             <a:pPr algn="l"/>
             <a:fld id="{F7021451-1387-4CA6-816F-3879F97B5CBC}" type="slidenum">
-              <a:rPr b="0" lang="en-US"/>
+              <a:rPr lang="en-US" b="0"/>
               <a:t>5</a:t>
             </a:fld>
             <a:endParaRPr lang="en-US"/>
@@ -10635,9 +10454,11 @@
       <p:sp>
         <p:nvSpPr>
           <p:cNvPr id="2" name="Text 0"/>
-          <p:cNvSpPr/>
+          <p:cNvSpPr>
+            <a:spLocks noGrp="1"/>
+          </p:cNvSpPr>
           <p:nvPr>
-            <p:ph idx="100" type="title" hasCustomPrompt="1"/>
+            <p:ph type="title" idx="100" hasCustomPrompt="1"/>
           </p:nvPr>
         </p:nvSpPr>
         <p:spPr>
@@ -10655,7 +10476,7 @@
           <a:bodyPr wrap="square" rtlCol="0"/>
           <a:lstStyle/>
           <a:p>
-            <a:pPr algn="l" indent="0" marL="0">
+            <a:pPr marL="0" indent="0" algn="l">
               <a:buNone/>
             </a:pPr>
             <a:r>
@@ -10672,14 +10493,14 @@
       </p:sp>
       <p:pic>
         <p:nvPicPr>
-          <p:cNvPr id="3" name="Image 0" descr="C:\Users\ACER\Desktop\translation-compiler\report_submission\screenshots\gui_04_stage_semantic.png">    </p:cNvPr>
+          <p:cNvPr id="3" name="Image 0" descr="C:\Users\ACER\Desktop\translation-compiler\report_submission\screenshots\gui_04_stage_semantic.png"/>
           <p:cNvPicPr>
             <a:picLocks noChangeAspect="1"/>
           </p:cNvPicPr>
           <p:nvPr/>
         </p:nvPicPr>
         <p:blipFill>
-          <a:blip r:embed="rId1"/>
+          <a:blip r:embed="rId3"/>
           <a:stretch>
             <a:fillRect/>
           </a:stretch>
@@ -10848,7 +10669,7 @@
           <a:bodyPr wrap="square" lIns="0" tIns="0" rIns="0" bIns="0" rtlCol="0" anchor="ctr"/>
           <a:lstStyle/>
           <a:p>
-            <a:pPr indent="0" marL="0">
+            <a:pPr marL="0" indent="0">
               <a:buNone/>
             </a:pPr>
             <a:r>
@@ -10859,9 +10680,6 @@
               </a:rPr>
               <a:t>DEMO   </a:t>
             </a:r>
-            <a:pPr indent="0" marL="0">
-              <a:buNone/>
-            </a:pPr>
             <a:r>
               <a:rPr lang="en-US" sz="1250" dirty="0">
                 <a:solidFill>
@@ -10895,7 +10713,7 @@
           <a:bodyPr wrap="square" lIns="0" tIns="0" rIns="0" bIns="0" rtlCol="0" anchor="ctr"/>
           <a:lstStyle/>
           <a:p>
-            <a:pPr indent="0" marL="0">
+            <a:pPr marL="0" indent="0">
               <a:buNone/>
             </a:pPr>
             <a:r>
@@ -10930,7 +10748,7 @@
           </a:prstGeom>
           <a:extLst>
             <a:ext uri="{C572A759-6A51-4108-AA02-DFA0A04FC94B}">
-              <ma14:wrappingTextBoxFlag xmlns:ma14="http://schemas.microsoft.com/office/mac/drawingml/2011/main" val="0"/>
+              <ma14:wrappingTextBoxFlag xmlns:ma14="http://schemas.microsoft.com/office/mac/drawingml/2011/main" xmlns="" val="0"/>
             </a:ext>
           </a:extLst>
         </p:spPr>
@@ -10948,7 +10766,7 @@
           <a:p>
             <a:pPr algn="l"/>
             <a:fld id="{F7021451-1387-4CA6-816F-3879F97B5CBC}" type="slidenum">
-              <a:rPr b="0" lang="en-US"/>
+              <a:rPr lang="en-US" b="0"/>
               <a:t>6</a:t>
             </a:fld>
             <a:endParaRPr lang="en-US"/>
@@ -10983,9 +10801,11 @@
       <p:sp>
         <p:nvSpPr>
           <p:cNvPr id="2" name="Text 0"/>
-          <p:cNvSpPr/>
+          <p:cNvSpPr>
+            <a:spLocks noGrp="1"/>
+          </p:cNvSpPr>
           <p:nvPr>
-            <p:ph idx="100" type="title" hasCustomPrompt="1"/>
+            <p:ph type="title" idx="100" hasCustomPrompt="1"/>
           </p:nvPr>
         </p:nvSpPr>
         <p:spPr>
@@ -11003,7 +10823,7 @@
           <a:bodyPr wrap="square" rtlCol="0"/>
           <a:lstStyle/>
           <a:p>
-            <a:pPr algn="l" indent="0" marL="0">
+            <a:pPr marL="0" indent="0" algn="l">
               <a:buNone/>
             </a:pPr>
             <a:r>
@@ -11020,14 +10840,14 @@
       </p:sp>
       <p:pic>
         <p:nvPicPr>
-          <p:cNvPr id="3" name="Image 0" descr="C:\Users\ACER\Desktop\translation-compiler\report_submission\screenshots\gui_05_stage_codegen.png">    </p:cNvPr>
+          <p:cNvPr id="3" name="Image 0" descr="C:\Users\ACER\Desktop\translation-compiler\report_submission\screenshots\gui_05_stage_codegen.png"/>
           <p:cNvPicPr>
             <a:picLocks noChangeAspect="1"/>
           </p:cNvPicPr>
           <p:nvPr/>
         </p:nvPicPr>
         <p:blipFill>
-          <a:blip r:embed="rId1"/>
+          <a:blip r:embed="rId3"/>
           <a:stretch>
             <a:fillRect/>
           </a:stretch>
@@ -11196,7 +11016,7 @@
           <a:bodyPr wrap="square" lIns="0" tIns="0" rIns="0" bIns="0" rtlCol="0" anchor="ctr"/>
           <a:lstStyle/>
           <a:p>
-            <a:pPr indent="0" marL="0">
+            <a:pPr marL="0" indent="0">
               <a:buNone/>
             </a:pPr>
             <a:r>
@@ -11207,9 +11027,6 @@
               </a:rPr>
               <a:t>DEMO   </a:t>
             </a:r>
-            <a:pPr indent="0" marL="0">
-              <a:buNone/>
-            </a:pPr>
             <a:r>
               <a:rPr lang="en-US" sz="1250" dirty="0">
                 <a:solidFill>
@@ -11243,7 +11060,7 @@
           <a:bodyPr wrap="square" lIns="0" tIns="0" rIns="0" bIns="0" rtlCol="0" anchor="ctr"/>
           <a:lstStyle/>
           <a:p>
-            <a:pPr indent="0" marL="0">
+            <a:pPr marL="0" indent="0">
               <a:buNone/>
             </a:pPr>
             <a:r>
@@ -11278,7 +11095,7 @@
           </a:prstGeom>
           <a:extLst>
             <a:ext uri="{C572A759-6A51-4108-AA02-DFA0A04FC94B}">
-              <ma14:wrappingTextBoxFlag xmlns:ma14="http://schemas.microsoft.com/office/mac/drawingml/2011/main" val="0"/>
+              <ma14:wrappingTextBoxFlag xmlns:ma14="http://schemas.microsoft.com/office/mac/drawingml/2011/main" xmlns="" val="0"/>
             </a:ext>
           </a:extLst>
         </p:spPr>
@@ -11296,7 +11113,7 @@
           <a:p>
             <a:pPr algn="l"/>
             <a:fld id="{F7021451-1387-4CA6-816F-3879F97B5CBC}" type="slidenum">
-              <a:rPr b="0" lang="en-US"/>
+              <a:rPr lang="en-US" b="0"/>
               <a:t>7</a:t>
             </a:fld>
             <a:endParaRPr lang="en-US"/>
@@ -11331,9 +11148,11 @@
       <p:sp>
         <p:nvSpPr>
           <p:cNvPr id="2" name="Text 0"/>
-          <p:cNvSpPr/>
+          <p:cNvSpPr>
+            <a:spLocks noGrp="1"/>
+          </p:cNvSpPr>
           <p:nvPr>
-            <p:ph idx="100" type="title" hasCustomPrompt="1"/>
+            <p:ph type="title" idx="100" hasCustomPrompt="1"/>
           </p:nvPr>
         </p:nvSpPr>
         <p:spPr>
@@ -11351,7 +11170,7 @@
           <a:bodyPr wrap="square" rtlCol="0"/>
           <a:lstStyle/>
           <a:p>
-            <a:pPr algn="l" indent="0" marL="0">
+            <a:pPr marL="0" indent="0" algn="l">
               <a:buNone/>
             </a:pPr>
             <a:r>
@@ -11369,9 +11188,11 @@
       <p:sp>
         <p:nvSpPr>
           <p:cNvPr id="3" name="Text 0"/>
-          <p:cNvSpPr/>
+          <p:cNvSpPr>
+            <a:spLocks noGrp="1"/>
+          </p:cNvSpPr>
           <p:nvPr>
-            <p:ph idx="101" type="body" hasCustomPrompt="1"/>
+            <p:ph type="body" idx="101" hasCustomPrompt="1"/>
           </p:nvPr>
         </p:nvSpPr>
         <p:spPr>
@@ -11389,7 +11210,7 @@
           <a:bodyPr wrap="square" rtlCol="0"/>
           <a:lstStyle/>
           <a:p>
-            <a:pPr algn="l" indent="0" marL="0">
+            <a:pPr marL="0" indent="0" algn="l">
               <a:buNone/>
             </a:pPr>
             <a:r>
@@ -11424,7 +11245,7 @@
           </a:prstGeom>
           <a:extLst>
             <a:ext uri="{C572A759-6A51-4108-AA02-DFA0A04FC94B}">
-              <ma14:wrappingTextBoxFlag xmlns:ma14="http://schemas.microsoft.com/office/mac/drawingml/2011/main" val="0"/>
+              <ma14:wrappingTextBoxFlag xmlns:ma14="http://schemas.microsoft.com/office/mac/drawingml/2011/main" xmlns="" val="0"/>
             </a:ext>
           </a:extLst>
         </p:spPr>
@@ -11442,7 +11263,7 @@
           <a:p>
             <a:pPr algn="l"/>
             <a:fld id="{F7021451-1387-4CA6-816F-3879F97B5CBC}" type="slidenum">
-              <a:rPr b="0" lang="en-US"/>
+              <a:rPr lang="en-US" b="0"/>
               <a:t>8</a:t>
             </a:fld>
             <a:endParaRPr lang="en-US"/>
@@ -11477,9 +11298,11 @@
       <p:sp>
         <p:nvSpPr>
           <p:cNvPr id="2" name="Text 0"/>
-          <p:cNvSpPr/>
+          <p:cNvSpPr>
+            <a:spLocks noGrp="1"/>
+          </p:cNvSpPr>
           <p:nvPr>
-            <p:ph idx="100" type="title" hasCustomPrompt="1"/>
+            <p:ph type="title" idx="100" hasCustomPrompt="1"/>
           </p:nvPr>
         </p:nvSpPr>
         <p:spPr>
@@ -11497,7 +11320,7 @@
           <a:bodyPr wrap="square" rtlCol="0"/>
           <a:lstStyle/>
           <a:p>
-            <a:pPr algn="l" indent="0" marL="0">
+            <a:pPr marL="0" indent="0" algn="l">
               <a:buNone/>
             </a:pPr>
             <a:r>
@@ -11666,7 +11489,7 @@
           <a:bodyPr wrap="square" lIns="0" tIns="0" rIns="0" bIns="0" rtlCol="0" anchor="ctr"/>
           <a:lstStyle/>
           <a:p>
-            <a:pPr indent="0" marL="0">
+            <a:pPr marL="0" indent="0">
               <a:lnSpc>
                 <a:spcPct val="112000"/>
               </a:lnSpc>
@@ -11686,7 +11509,7 @@
             <a:endParaRPr lang="en-US" sz="1100" dirty="0"/>
           </a:p>
           <a:p>
-            <a:pPr indent="0" marL="0">
+            <a:pPr marL="0" indent="0">
               <a:lnSpc>
                 <a:spcPct val="112000"/>
               </a:lnSpc>
@@ -11706,7 +11529,7 @@
             <a:endParaRPr lang="en-US" sz="1100" dirty="0"/>
           </a:p>
           <a:p>
-            <a:pPr indent="0" marL="0">
+            <a:pPr marL="0" indent="0">
               <a:lnSpc>
                 <a:spcPct val="112000"/>
               </a:lnSpc>
@@ -11726,7 +11549,7 @@
             <a:endParaRPr lang="en-US" sz="1100" dirty="0"/>
           </a:p>
           <a:p>
-            <a:pPr indent="0" marL="0">
+            <a:pPr marL="0" indent="0">
               <a:lnSpc>
                 <a:spcPct val="112000"/>
               </a:lnSpc>
@@ -11746,7 +11569,7 @@
             <a:endParaRPr lang="en-US" sz="1100" dirty="0"/>
           </a:p>
           <a:p>
-            <a:pPr indent="0" marL="0">
+            <a:pPr marL="0" indent="0">
               <a:lnSpc>
                 <a:spcPct val="112000"/>
               </a:lnSpc>
@@ -11815,7 +11638,7 @@
           <a:bodyPr wrap="square" lIns="0" tIns="0" rIns="0" bIns="0" rtlCol="0" anchor="ctr"/>
           <a:lstStyle/>
           <a:p>
-            <a:pPr indent="0" marL="0">
+            <a:pPr marL="0" indent="0">
               <a:buNone/>
             </a:pPr>
             <a:r>
@@ -11851,7 +11674,7 @@
           <a:bodyPr wrap="square" lIns="0" tIns="0" rIns="0" bIns="0" rtlCol="0" anchor="ctr"/>
           <a:lstStyle/>
           <a:p>
-            <a:pPr indent="0" marL="0">
+            <a:pPr marL="0" indent="0">
               <a:buNone/>
             </a:pPr>
             <a:r>
@@ -11914,7 +11737,7 @@
           <a:bodyPr wrap="square" lIns="0" tIns="0" rIns="0" bIns="0" rtlCol="0" anchor="ctr"/>
           <a:lstStyle/>
           <a:p>
-            <a:pPr indent="0" marL="0">
+            <a:pPr marL="0" indent="0">
               <a:buNone/>
             </a:pPr>
             <a:r>
@@ -11925,9 +11748,6 @@
               </a:rPr>
               <a:t>DEMO   </a:t>
             </a:r>
-            <a:pPr indent="0" marL="0">
-              <a:buNone/>
-            </a:pPr>
             <a:r>
               <a:rPr lang="en-US" sz="1250" dirty="0">
                 <a:solidFill>
@@ -11960,7 +11780,7 @@
           </a:prstGeom>
           <a:extLst>
             <a:ext uri="{C572A759-6A51-4108-AA02-DFA0A04FC94B}">
-              <ma14:wrappingTextBoxFlag xmlns:ma14="http://schemas.microsoft.com/office/mac/drawingml/2011/main" val="0"/>
+              <ma14:wrappingTextBoxFlag xmlns:ma14="http://schemas.microsoft.com/office/mac/drawingml/2011/main" xmlns="" val="0"/>
             </a:ext>
           </a:extLst>
         </p:spPr>
@@ -11978,7 +11798,7 @@
           <a:p>
             <a:pPr algn="l"/>
             <a:fld id="{F7021451-1387-4CA6-816F-3879F97B5CBC}" type="slidenum">
-              <a:rPr b="0" lang="en-US"/>
+              <a:rPr lang="en-US" b="0"/>
               <a:t>9</a:t>
             </a:fld>
             <a:endParaRPr lang="en-US"/>
@@ -12286,4 +12106,299 @@
     </a:ext>
   </a:extLst>
 </a:theme>
+</file>
+
+<file path=ppt/theme/theme2.xml><?xml version="1.0" encoding="utf-8"?>
+<a:theme xmlns:a="http://schemas.openxmlformats.org/drawingml/2006/main" name="Office Theme">
+  <a:themeElements>
+    <a:clrScheme name="Office">
+      <a:dk1>
+        <a:sysClr val="windowText" lastClr="000000"/>
+      </a:dk1>
+      <a:lt1>
+        <a:sysClr val="window" lastClr="FFFFFF"/>
+      </a:lt1>
+      <a:dk2>
+        <a:srgbClr val="44546A"/>
+      </a:dk2>
+      <a:lt2>
+        <a:srgbClr val="E7E6E6"/>
+      </a:lt2>
+      <a:accent1>
+        <a:srgbClr val="4472C4"/>
+      </a:accent1>
+      <a:accent2>
+        <a:srgbClr val="ED7D31"/>
+      </a:accent2>
+      <a:accent3>
+        <a:srgbClr val="A5A5A5"/>
+      </a:accent3>
+      <a:accent4>
+        <a:srgbClr val="FFC000"/>
+      </a:accent4>
+      <a:accent5>
+        <a:srgbClr val="5B9BD5"/>
+      </a:accent5>
+      <a:accent6>
+        <a:srgbClr val="70AD47"/>
+      </a:accent6>
+      <a:hlink>
+        <a:srgbClr val="0563C1"/>
+      </a:hlink>
+      <a:folHlink>
+        <a:srgbClr val="954F72"/>
+      </a:folHlink>
+    </a:clrScheme>
+    <a:fontScheme name="Office">
+      <a:majorFont>
+        <a:latin typeface="Calibri Light" panose="020F0302020204030204"/>
+        <a:ea typeface=""/>
+        <a:cs typeface=""/>
+        <a:font script="Jpan" typeface="游ゴシック Light"/>
+        <a:font script="Hang" typeface="맑은 고딕"/>
+        <a:font script="Hans" typeface="等线 Light"/>
+        <a:font script="Hant" typeface="新細明體"/>
+        <a:font script="Arab" typeface="Times New Roman"/>
+        <a:font script="Hebr" typeface="Times New Roman"/>
+        <a:font script="Thai" typeface="Angsana New"/>
+        <a:font script="Ethi" typeface="Nyala"/>
+        <a:font script="Beng" typeface="Vrinda"/>
+        <a:font script="Gujr" typeface="Shruti"/>
+        <a:font script="Khmr" typeface="MoolBoran"/>
+        <a:font script="Knda" typeface="Tunga"/>
+        <a:font script="Guru" typeface="Raavi"/>
+        <a:font script="Cans" typeface="Euphemia"/>
+        <a:font script="Cher" typeface="Plantagenet Cherokee"/>
+        <a:font script="Yiii" typeface="Microsoft Yi Baiti"/>
+        <a:font script="Tibt" typeface="Microsoft Himalaya"/>
+        <a:font script="Thaa" typeface="MV Boli"/>
+        <a:font script="Deva" typeface="Mangal"/>
+        <a:font script="Telu" typeface="Gautami"/>
+        <a:font script="Taml" typeface="Latha"/>
+        <a:font script="Syrc" typeface="Estrangelo Edessa"/>
+        <a:font script="Orya" typeface="Kalinga"/>
+        <a:font script="Mlym" typeface="Kartika"/>
+        <a:font script="Laoo" typeface="DokChampa"/>
+        <a:font script="Sinh" typeface="Iskoola Pota"/>
+        <a:font script="Mong" typeface="Mongolian Baiti"/>
+        <a:font script="Viet" typeface="Times New Roman"/>
+        <a:font script="Uigh" typeface="Microsoft Uighur"/>
+        <a:font script="Geor" typeface="Sylfaen"/>
+        <a:font script="Armn" typeface="Arial"/>
+        <a:font script="Bugi" typeface="Leelawadee UI"/>
+        <a:font script="Bopo" typeface="Microsoft JhengHei"/>
+        <a:font script="Java" typeface="Javanese Text"/>
+        <a:font script="Lisu" typeface="Segoe UI"/>
+        <a:font script="Mymr" typeface="Myanmar Text"/>
+        <a:font script="Nkoo" typeface="Ebrima"/>
+        <a:font script="Olck" typeface="Nirmala UI"/>
+        <a:font script="Osma" typeface="Ebrima"/>
+        <a:font script="Phag" typeface="Phagspa"/>
+        <a:font script="Syrn" typeface="Estrangelo Edessa"/>
+        <a:font script="Syrj" typeface="Estrangelo Edessa"/>
+        <a:font script="Syre" typeface="Estrangelo Edessa"/>
+        <a:font script="Sora" typeface="Nirmala UI"/>
+        <a:font script="Tale" typeface="Microsoft Tai Le"/>
+        <a:font script="Talu" typeface="Microsoft New Tai Lue"/>
+        <a:font script="Tfng" typeface="Ebrima"/>
+      </a:majorFont>
+      <a:minorFont>
+        <a:latin typeface="Calibri" panose="020F0502020204030204"/>
+        <a:ea typeface=""/>
+        <a:cs typeface=""/>
+        <a:font script="Jpan" typeface="游ゴシック"/>
+        <a:font script="Hang" typeface="맑은 고딕"/>
+        <a:font script="Hans" typeface="等线"/>
+        <a:font script="Hant" typeface="新細明體"/>
+        <a:font script="Arab" typeface="Arial"/>
+        <a:font script="Hebr" typeface="Arial"/>
+        <a:font script="Thai" typeface="Cordia New"/>
+        <a:font script="Ethi" typeface="Nyala"/>
+        <a:font script="Beng" typeface="Vrinda"/>
+        <a:font script="Gujr" typeface="Shruti"/>
+        <a:font script="Khmr" typeface="DaunPenh"/>
+        <a:font script="Knda" typeface="Tunga"/>
+        <a:font script="Guru" typeface="Raavi"/>
+        <a:font script="Cans" typeface="Euphemia"/>
+        <a:font script="Cher" typeface="Plantagenet Cherokee"/>
+        <a:font script="Yiii" typeface="Microsoft Yi Baiti"/>
+        <a:font script="Tibt" typeface="Microsoft Himalaya"/>
+        <a:font script="Thaa" typeface="MV Boli"/>
+        <a:font script="Deva" typeface="Mangal"/>
+        <a:font script="Telu" typeface="Gautami"/>
+        <a:font script="Taml" typeface="Latha"/>
+        <a:font script="Syrc" typeface="Estrangelo Edessa"/>
+        <a:font script="Orya" typeface="Kalinga"/>
+        <a:font script="Mlym" typeface="Kartika"/>
+        <a:font script="Laoo" typeface="DokChampa"/>
+        <a:font script="Sinh" typeface="Iskoola Pota"/>
+        <a:font script="Mong" typeface="Mongolian Baiti"/>
+        <a:font script="Viet" typeface="Arial"/>
+        <a:font script="Uigh" typeface="Microsoft Uighur"/>
+        <a:font script="Geor" typeface="Sylfaen"/>
+        <a:font script="Armn" typeface="Arial"/>
+        <a:font script="Bugi" typeface="Leelawadee UI"/>
+        <a:font script="Bopo" typeface="Microsoft JhengHei"/>
+        <a:font script="Java" typeface="Javanese Text"/>
+        <a:font script="Lisu" typeface="Segoe UI"/>
+        <a:font script="Mymr" typeface="Myanmar Text"/>
+        <a:font script="Nkoo" typeface="Ebrima"/>
+        <a:font script="Olck" typeface="Nirmala UI"/>
+        <a:font script="Osma" typeface="Ebrima"/>
+        <a:font script="Phag" typeface="Phagspa"/>
+        <a:font script="Syrn" typeface="Estrangelo Edessa"/>
+        <a:font script="Syrj" typeface="Estrangelo Edessa"/>
+        <a:font script="Syre" typeface="Estrangelo Edessa"/>
+        <a:font script="Sora" typeface="Nirmala UI"/>
+        <a:font script="Tale" typeface="Microsoft Tai Le"/>
+        <a:font script="Talu" typeface="Microsoft New Tai Lue"/>
+        <a:font script="Tfng" typeface="Ebrima"/>
+      </a:minorFont>
+    </a:fontScheme>
+    <a:fmtScheme name="Office">
+      <a:fillStyleLst>
+        <a:solidFill>
+          <a:schemeClr val="phClr"/>
+        </a:solidFill>
+        <a:gradFill rotWithShape="1">
+          <a:gsLst>
+            <a:gs pos="0">
+              <a:schemeClr val="phClr">
+                <a:lumMod val="110000"/>
+                <a:satMod val="105000"/>
+                <a:tint val="67000"/>
+              </a:schemeClr>
+            </a:gs>
+            <a:gs pos="50000">
+              <a:schemeClr val="phClr">
+                <a:lumMod val="105000"/>
+                <a:satMod val="103000"/>
+                <a:tint val="73000"/>
+              </a:schemeClr>
+            </a:gs>
+            <a:gs pos="100000">
+              <a:schemeClr val="phClr">
+                <a:lumMod val="105000"/>
+                <a:satMod val="109000"/>
+                <a:tint val="81000"/>
+              </a:schemeClr>
+            </a:gs>
+          </a:gsLst>
+          <a:lin ang="5400000" scaled="0"/>
+        </a:gradFill>
+        <a:gradFill rotWithShape="1">
+          <a:gsLst>
+            <a:gs pos="0">
+              <a:schemeClr val="phClr">
+                <a:satMod val="103000"/>
+                <a:lumMod val="102000"/>
+                <a:tint val="94000"/>
+              </a:schemeClr>
+            </a:gs>
+            <a:gs pos="50000">
+              <a:schemeClr val="phClr">
+                <a:satMod val="110000"/>
+                <a:lumMod val="100000"/>
+                <a:shade val="100000"/>
+              </a:schemeClr>
+            </a:gs>
+            <a:gs pos="100000">
+              <a:schemeClr val="phClr">
+                <a:lumMod val="99000"/>
+                <a:satMod val="120000"/>
+                <a:shade val="78000"/>
+              </a:schemeClr>
+            </a:gs>
+          </a:gsLst>
+          <a:lin ang="5400000" scaled="0"/>
+        </a:gradFill>
+      </a:fillStyleLst>
+      <a:lnStyleLst>
+        <a:ln w="6350" cap="flat" cmpd="sng" algn="ctr">
+          <a:solidFill>
+            <a:schemeClr val="phClr"/>
+          </a:solidFill>
+          <a:prstDash val="solid"/>
+          <a:miter lim="800000"/>
+        </a:ln>
+        <a:ln w="12700" cap="flat" cmpd="sng" algn="ctr">
+          <a:solidFill>
+            <a:schemeClr val="phClr"/>
+          </a:solidFill>
+          <a:prstDash val="solid"/>
+          <a:miter lim="800000"/>
+        </a:ln>
+        <a:ln w="19050" cap="flat" cmpd="sng" algn="ctr">
+          <a:solidFill>
+            <a:schemeClr val="phClr"/>
+          </a:solidFill>
+          <a:prstDash val="solid"/>
+          <a:miter lim="800000"/>
+        </a:ln>
+      </a:lnStyleLst>
+      <a:effectStyleLst>
+        <a:effectStyle>
+          <a:effectLst/>
+        </a:effectStyle>
+        <a:effectStyle>
+          <a:effectLst/>
+        </a:effectStyle>
+        <a:effectStyle>
+          <a:effectLst>
+            <a:outerShdw blurRad="57150" dist="19050" dir="5400000" algn="ctr" rotWithShape="0">
+              <a:srgbClr val="000000">
+                <a:alpha val="63000"/>
+              </a:srgbClr>
+            </a:outerShdw>
+          </a:effectLst>
+        </a:effectStyle>
+      </a:effectStyleLst>
+      <a:bgFillStyleLst>
+        <a:solidFill>
+          <a:schemeClr val="phClr"/>
+        </a:solidFill>
+        <a:solidFill>
+          <a:schemeClr val="phClr">
+            <a:tint val="95000"/>
+            <a:satMod val="170000"/>
+          </a:schemeClr>
+        </a:solidFill>
+        <a:gradFill rotWithShape="1">
+          <a:gsLst>
+            <a:gs pos="0">
+              <a:schemeClr val="phClr">
+                <a:tint val="93000"/>
+                <a:satMod val="150000"/>
+                <a:shade val="98000"/>
+                <a:lumMod val="102000"/>
+              </a:schemeClr>
+            </a:gs>
+            <a:gs pos="50000">
+              <a:schemeClr val="phClr">
+                <a:tint val="98000"/>
+                <a:satMod val="130000"/>
+                <a:shade val="90000"/>
+                <a:lumMod val="103000"/>
+              </a:schemeClr>
+            </a:gs>
+            <a:gs pos="100000">
+              <a:schemeClr val="phClr">
+                <a:shade val="63000"/>
+                <a:satMod val="120000"/>
+              </a:schemeClr>
+            </a:gs>
+          </a:gsLst>
+          <a:lin ang="5400000" scaled="0"/>
+        </a:gradFill>
+      </a:bgFillStyleLst>
+    </a:fmtScheme>
+  </a:themeElements>
+  <a:objectDefaults/>
+  <a:extraClrSchemeLst/>
+  <a:extLst>
+    <a:ext uri="{05A4C25C-085E-4340-85A3-A5531E510DB2}">
+      <thm15:themeFamily xmlns:thm15="http://schemas.microsoft.com/office/thememl/2012/main" name="Office Theme" id="{62F939B6-93AF-4DB8-9C6B-D6C7DFDC589F}" vid="{4A3C46E8-61CC-4603-A589-7422A47A8E4A}"/>
+    </a:ext>
+  </a:extLst>
+</a:theme>
 </file>